--- a/evaluation/dashboard/public/decks/uxl-onetbb-maintainer-briefing.pptx
+++ b/evaluation/dashboard/public/decks/uxl-onetbb-maintainer-briefing.pptx
@@ -2,20 +2,19 @@
 <file path=ppt/presentation.xml><?xml version="1.0" encoding="utf-8"?>
 <p:presentation xmlns:p="http://schemas.openxmlformats.org/presentationml/2006/main">
   <p:sldMasterIdLst>
-    <p:sldMasterId xmlns:r="http://schemas.openxmlformats.org/officeDocument/2006/relationships" id="2147483648" r:id="R43b82c39262343fe"/>
-    <p:sldMasterId xmlns:r="http://schemas.openxmlformats.org/officeDocument/2006/relationships" id="2147483665" r:id="R9da66104fa634a15"/>
+    <p:sldMasterId xmlns:r="http://schemas.openxmlformats.org/officeDocument/2006/relationships" id="2147483648" r:id="Rd070dea4b73749ba"/>
+    <p:sldMasterId xmlns:r="http://schemas.openxmlformats.org/officeDocument/2006/relationships" id="2147483665" r:id="Rf86e600c91084c3c"/>
   </p:sldMasterIdLst>
   <p:notesMasterIdLst>
-    <p:notesMasterId xmlns:r="http://schemas.openxmlformats.org/officeDocument/2006/relationships" r:id="R6904c7ae93864425"/>
+    <p:notesMasterId xmlns:r="http://schemas.openxmlformats.org/officeDocument/2006/relationships" r:id="R490919d763a641c3"/>
   </p:notesMasterIdLst>
   <p:sldIdLst>
-    <p:sldId xmlns:r="http://schemas.openxmlformats.org/officeDocument/2006/relationships" id="256" r:id="R4a407b898dfe4550"/>
-    <p:sldId xmlns:r="http://schemas.openxmlformats.org/officeDocument/2006/relationships" id="257" r:id="R0a95868fd39842e9"/>
-    <p:sldId xmlns:r="http://schemas.openxmlformats.org/officeDocument/2006/relationships" id="258" r:id="R2545bc2f11be4f05"/>
-    <p:sldId xmlns:r="http://schemas.openxmlformats.org/officeDocument/2006/relationships" id="259" r:id="Rc7448b15bd5c46c8"/>
-    <p:sldId xmlns:r="http://schemas.openxmlformats.org/officeDocument/2006/relationships" id="260" r:id="Rc07d5dd2f2014e4f"/>
-    <p:sldId xmlns:r="http://schemas.openxmlformats.org/officeDocument/2006/relationships" id="261" r:id="Rb23bd87ff8544d09"/>
-    <p:sldId xmlns:r="http://schemas.openxmlformats.org/officeDocument/2006/relationships" id="262" r:id="R47e3ddc9a2dc43c1"/>
+    <p:sldId xmlns:r="http://schemas.openxmlformats.org/officeDocument/2006/relationships" id="256" r:id="R511331e9b4fb47c1"/>
+    <p:sldId xmlns:r="http://schemas.openxmlformats.org/officeDocument/2006/relationships" id="257" r:id="Rfd4ca47b27654705"/>
+    <p:sldId xmlns:r="http://schemas.openxmlformats.org/officeDocument/2006/relationships" id="258" r:id="R8144af880dde4300"/>
+    <p:sldId xmlns:r="http://schemas.openxmlformats.org/officeDocument/2006/relationships" id="259" r:id="R85f891f736a546ff"/>
+    <p:sldId xmlns:r="http://schemas.openxmlformats.org/officeDocument/2006/relationships" id="260" r:id="R27a758ee80dd4a01"/>
+    <p:sldId xmlns:r="http://schemas.openxmlformats.org/officeDocument/2006/relationships" id="261" r:id="Rfbb711298fe34c5f"/>
   </p:sldIdLst>
   <p:sldSz cx="12192000" cy="6858000"/>
   <p:notesSz cx="6858000" cy="9144000"/>
@@ -619,7 +618,7 @@
           </a:p>
           <a:p xmlns:a="http://schemas.openxmlformats.org/drawingml/2006/main">
             <a:r>
-              <a:t>Speaker cue: Why this is useful to oneTBB at first glance</a:t>
+              <a:t>Speaker cue: What the skill tells an agent today</a:t>
             </a:r>
           </a:p>
         </p:txBody>
@@ -724,7 +723,7 @@
           </a:p>
           <a:p xmlns:a="http://schemas.openxmlformats.org/drawingml/2006/main">
             <a:r>
-              <a:t>Speaker cue: What the skill tells an agent today</a:t>
+              <a:t>Speaker cue: Evaluation inventory: all 7 tasks implemented</a:t>
             </a:r>
           </a:p>
         </p:txBody>
@@ -829,7 +828,7 @@
           </a:p>
           <a:p xmlns:a="http://schemas.openxmlformats.org/drawingml/2006/main">
             <a:r>
-              <a:t>Speaker cue: Evaluation inventory: all 7 tasks implemented</a:t>
+              <a:t>Speaker cue: How we chose the content</a:t>
             </a:r>
           </a:p>
         </p:txBody>
@@ -934,7 +933,7 @@
           </a:p>
           <a:p xmlns:a="http://schemas.openxmlformats.org/drawingml/2006/main">
             <a:r>
-              <a:t>Speaker cue: How we chose the content</a:t>
+              <a:t>Speaker cue: What project ownership would look like</a:t>
             </a:r>
           </a:p>
         </p:txBody>
@@ -965,111 +964,6 @@
 </file>
 
 <file path=ppt/notesSlides/notesSlide6.xml><?xml version="1.0" encoding="utf-8"?>
-<p:notes xmlns:p="http://schemas.openxmlformats.org/presentationml/2006/main">
-  <p:cSld>
-    <p:spTree>
-      <p:nvGrpSpPr>
-        <p:cNvPr id="1" name=""/>
-        <p:cNvGrpSpPr/>
-        <p:nvPr/>
-      </p:nvGrpSpPr>
-      <p:grpSpPr>
-        <a:xfrm xmlns:a="http://schemas.openxmlformats.org/drawingml/2006/main"/>
-      </p:grpSpPr>
-      <p:sp>
-        <p:nvSpPr>
-          <p:cNvPr id="2" name="Slide Image Placeholder 1"/>
-          <p:cNvSpPr>
-            <a:spLocks xmlns:a="http://schemas.openxmlformats.org/drawingml/2006/main" noGrp="1"/>
-          </p:cNvSpPr>
-          <p:nvPr>
-            <p:ph type="sldImg" idx="0"/>
-          </p:nvPr>
-        </p:nvSpPr>
-        <p:spPr/>
-      </p:sp>
-      <p:sp>
-        <p:nvSpPr>
-          <p:cNvPr id="3" name="Notes Placeholder 2"/>
-          <p:cNvSpPr>
-            <a:spLocks xmlns:a="http://schemas.openxmlformats.org/drawingml/2006/main" noGrp="1"/>
-          </p:cNvSpPr>
-          <p:nvPr>
-            <p:ph type="body" idx="1"/>
-          </p:nvPr>
-        </p:nvSpPr>
-        <p:spPr/>
-        <p:txBody>
-          <a:bodyPr xmlns:a="http://schemas.openxmlformats.org/drawingml/2006/main"/>
-          <a:lstStyle xmlns:a="http://schemas.openxmlformats.org/drawingml/2006/main"/>
-          <a:p xmlns:a="http://schemas.openxmlformats.org/drawingml/2006/main">
-            <a:r>
-              <a:t>[Sources]</a:t>
-            </a:r>
-          </a:p>
-          <a:p xmlns:a="http://schemas.openxmlformats.org/drawingml/2006/main">
-            <a:r>
-              <a:t>- https://github.com/uxlfoundation/skills/tree/main/skills/uxl-onetbb</a:t>
-            </a:r>
-          </a:p>
-          <a:p xmlns:a="http://schemas.openxmlformats.org/drawingml/2006/main">
-            <a:r>
-              <a:t>- https://github.com/uxlfoundation/skills/blob/main/skill-cards/uxl-onetbb.md</a:t>
-            </a:r>
-          </a:p>
-          <a:p xmlns:a="http://schemas.openxmlformats.org/drawingml/2006/main">
-            <a:r>
-              <a:t>- https://github.com/uxlfoundation/skills/blob/main/docs/maintainer-review/uxl-onetbb.md</a:t>
-            </a:r>
-          </a:p>
-          <a:p xmlns:a="http://schemas.openxmlformats.org/drawingml/2006/main">
-            <a:r>
-              <a:t>- https://github.com/uxlfoundation/skills/blob/main/evaluation/harbor/suites.json</a:t>
-            </a:r>
-          </a:p>
-          <a:p xmlns:a="http://schemas.openxmlformats.org/drawingml/2006/main">
-            <a:r>
-              <a:t>[/Sources]</a:t>
-            </a:r>
-          </a:p>
-          <a:p xmlns:a="http://schemas.openxmlformats.org/drawingml/2006/main">
-            <a:r>
-              <a:t/>
-            </a:r>
-          </a:p>
-          <a:p xmlns:a="http://schemas.openxmlformats.org/drawingml/2006/main">
-            <a:r>
-              <a:t>Speaker cue: What project ownership would look like</a:t>
-            </a:r>
-          </a:p>
-        </p:txBody>
-      </p:sp>
-      <p:sp>
-        <p:nvSpPr>
-          <p:cNvPr id="4" name="Slide Number Placeholder 3"/>
-          <p:cNvSpPr>
-            <a:spLocks xmlns:a="http://schemas.openxmlformats.org/drawingml/2006/main" noGrp="1"/>
-          </p:cNvSpPr>
-          <p:nvPr>
-            <p:ph type="sldNum" idx="5"/>
-          </p:nvPr>
-        </p:nvSpPr>
-        <p:spPr/>
-        <p:txBody>
-          <a:bodyPr xmlns:a="http://schemas.openxmlformats.org/drawingml/2006/main"/>
-          <a:lstStyle xmlns:a="http://schemas.openxmlformats.org/drawingml/2006/main"/>
-          <a:p xmlns:a="http://schemas.openxmlformats.org/drawingml/2006/main"/>
-        </p:txBody>
-      </p:sp>
-    </p:spTree>
-  </p:cSld>
-  <p:clrMapOvr>
-    <a:masterClrMapping xmlns:a="http://schemas.openxmlformats.org/drawingml/2006/main"/>
-  </p:clrMapOvr>
-</p:notes>
-</file>
-
-<file path=ppt/notesSlides/notesSlide7.xml><?xml version="1.0" encoding="utf-8"?>
 <p:notes xmlns:p="http://schemas.openxmlformats.org/presentationml/2006/main">
   <p:cSld>
     <p:spTree>
@@ -1180,7 +1074,7 @@
     <p:bg>
       <p:bgPr>
         <a:blipFill xmlns:a="http://schemas.openxmlformats.org/drawingml/2006/main">
-          <a:blip xmlns:r="http://schemas.openxmlformats.org/officeDocument/2006/relationships" r:embed="Rc7943be0f19c4592">
+          <a:blip xmlns:r="http://schemas.openxmlformats.org/officeDocument/2006/relationships" r:embed="R7bc2101834754b01">
             <a:alphaModFix/>
           </a:blip>
           <a:stretch>
@@ -1615,7 +1509,7 @@
           <p:nvPr/>
         </p:nvPicPr>
         <p:blipFill rotWithShape="1">
-          <a:blip xmlns:r="http://schemas.openxmlformats.org/officeDocument/2006/relationships" xmlns:a="http://schemas.openxmlformats.org/drawingml/2006/main" r:embed="Rdecd02062fa04cb6">
+          <a:blip xmlns:r="http://schemas.openxmlformats.org/officeDocument/2006/relationships" xmlns:a="http://schemas.openxmlformats.org/drawingml/2006/main" r:embed="R2b1f28b6bcc346b4">
             <a:alphaModFix/>
           </a:blip>
           <a:srcRect xmlns:a="http://schemas.openxmlformats.org/drawingml/2006/main" l="0" t="0" r="0" b="0"/>
@@ -1645,7 +1539,7 @@
     <p:bg>
       <p:bgPr>
         <a:blipFill xmlns:a="http://schemas.openxmlformats.org/drawingml/2006/main">
-          <a:blip xmlns:r="http://schemas.openxmlformats.org/officeDocument/2006/relationships" r:embed="Rdf09b7342b6f4a16">
+          <a:blip xmlns:r="http://schemas.openxmlformats.org/officeDocument/2006/relationships" r:embed="R7b26493363dc4ca0">
             <a:alphaModFix/>
           </a:blip>
           <a:stretch>
@@ -2679,7 +2573,7 @@
           <p:nvPr/>
         </p:nvPicPr>
         <p:blipFill rotWithShape="1">
-          <a:blip xmlns:r="http://schemas.openxmlformats.org/officeDocument/2006/relationships" xmlns:a="http://schemas.openxmlformats.org/drawingml/2006/main" r:embed="Rf4b8c83f53e34aec">
+          <a:blip xmlns:r="http://schemas.openxmlformats.org/officeDocument/2006/relationships" xmlns:a="http://schemas.openxmlformats.org/drawingml/2006/main" r:embed="R18417dca3f6843cd">
             <a:alphaModFix/>
           </a:blip>
           <a:srcRect xmlns:a="http://schemas.openxmlformats.org/drawingml/2006/main" l="0" t="0" r="0" b="0"/>
@@ -3703,7 +3597,7 @@
           <p:nvPr/>
         </p:nvPicPr>
         <p:blipFill rotWithShape="1">
-          <a:blip xmlns:r="http://schemas.openxmlformats.org/officeDocument/2006/relationships" xmlns:a="http://schemas.openxmlformats.org/drawingml/2006/main" r:embed="Re4951af116e54dff">
+          <a:blip xmlns:r="http://schemas.openxmlformats.org/officeDocument/2006/relationships" xmlns:a="http://schemas.openxmlformats.org/drawingml/2006/main" r:embed="R35d8f617f8494f95">
             <a:alphaModFix/>
           </a:blip>
           <a:srcRect xmlns:a="http://schemas.openxmlformats.org/drawingml/2006/main" l="0" t="0" r="0" b="0"/>
@@ -3733,7 +3627,7 @@
     <p:bg>
       <p:bgPr>
         <a:blipFill xmlns:a="http://schemas.openxmlformats.org/drawingml/2006/main">
-          <a:blip xmlns:r="http://schemas.openxmlformats.org/officeDocument/2006/relationships" r:embed="R747cf42727a54846">
+          <a:blip xmlns:r="http://schemas.openxmlformats.org/officeDocument/2006/relationships" r:embed="R1ade7e77323f490c">
             <a:alphaModFix/>
           </a:blip>
           <a:stretch>
@@ -5007,7 +4901,7 @@
           <p:nvPr/>
         </p:nvPicPr>
         <p:blipFill rotWithShape="1">
-          <a:blip xmlns:r="http://schemas.openxmlformats.org/officeDocument/2006/relationships" xmlns:a="http://schemas.openxmlformats.org/drawingml/2006/main" r:embed="R584b0afb4acc4f18">
+          <a:blip xmlns:r="http://schemas.openxmlformats.org/officeDocument/2006/relationships" xmlns:a="http://schemas.openxmlformats.org/drawingml/2006/main" r:embed="R8c15b6730b2e4b5f">
             <a:alphaModFix/>
           </a:blip>
           <a:srcRect xmlns:a="http://schemas.openxmlformats.org/drawingml/2006/main" l="0" t="0" r="0" b="0"/>
@@ -8251,7 +8145,7 @@
           <p:nvPr/>
         </p:nvPicPr>
         <p:blipFill rotWithShape="1">
-          <a:blip xmlns:r="http://schemas.openxmlformats.org/officeDocument/2006/relationships" xmlns:a="http://schemas.openxmlformats.org/drawingml/2006/main" r:embed="R09a0e16032694e75">
+          <a:blip xmlns:r="http://schemas.openxmlformats.org/officeDocument/2006/relationships" xmlns:a="http://schemas.openxmlformats.org/drawingml/2006/main" r:embed="R60862399c9004bcd">
             <a:alphaModFix/>
           </a:blip>
           <a:srcRect xmlns:a="http://schemas.openxmlformats.org/drawingml/2006/main" l="0" t="0" r="0" b="0"/>
@@ -9989,7 +9883,7 @@
           <p:nvPr/>
         </p:nvPicPr>
         <p:blipFill rotWithShape="1">
-          <a:blip xmlns:r="http://schemas.openxmlformats.org/officeDocument/2006/relationships" xmlns:a="http://schemas.openxmlformats.org/drawingml/2006/main" r:embed="R33c910cfa0d648dc">
+          <a:blip xmlns:r="http://schemas.openxmlformats.org/officeDocument/2006/relationships" xmlns:a="http://schemas.openxmlformats.org/drawingml/2006/main" r:embed="Rd00225c60d964010">
             <a:alphaModFix/>
           </a:blip>
           <a:srcRect xmlns:a="http://schemas.openxmlformats.org/drawingml/2006/main" l="0" t="0" r="0" b="0"/>
@@ -16818,7 +16712,7 @@
     <p:bg>
       <p:bgPr>
         <a:blipFill xmlns:a="http://schemas.openxmlformats.org/drawingml/2006/main">
-          <a:blip xmlns:r="http://schemas.openxmlformats.org/officeDocument/2006/relationships" r:embed="R36acb6a70c134e95">
+          <a:blip xmlns:r="http://schemas.openxmlformats.org/officeDocument/2006/relationships" r:embed="Rb545341e36854ede">
             <a:alphaModFix/>
           </a:blip>
           <a:stretch>
@@ -17253,7 +17147,7 @@
           <p:nvPr/>
         </p:nvPicPr>
         <p:blipFill rotWithShape="1">
-          <a:blip xmlns:r="http://schemas.openxmlformats.org/officeDocument/2006/relationships" xmlns:a="http://schemas.openxmlformats.org/drawingml/2006/main" r:embed="R9fb4887bffce4552">
+          <a:blip xmlns:r="http://schemas.openxmlformats.org/officeDocument/2006/relationships" xmlns:a="http://schemas.openxmlformats.org/drawingml/2006/main" r:embed="Rfcad40abc96b4457">
             <a:alphaModFix/>
           </a:blip>
           <a:srcRect xmlns:a="http://schemas.openxmlformats.org/drawingml/2006/main" l="0" t="0" r="0" b="0"/>
@@ -17283,7 +17177,7 @@
     <p:bg>
       <p:bgPr>
         <a:blipFill xmlns:a="http://schemas.openxmlformats.org/drawingml/2006/main">
-          <a:blip xmlns:r="http://schemas.openxmlformats.org/officeDocument/2006/relationships" r:embed="R2695e23b61634a29">
+          <a:blip xmlns:r="http://schemas.openxmlformats.org/officeDocument/2006/relationships" r:embed="R42e6f1569f9f4e6e">
             <a:alphaModFix/>
           </a:blip>
           <a:stretch>
@@ -17916,7 +17810,7 @@
           <p:nvPr/>
         </p:nvPicPr>
         <p:blipFill rotWithShape="1">
-          <a:blip xmlns:r="http://schemas.openxmlformats.org/officeDocument/2006/relationships" xmlns:a="http://schemas.openxmlformats.org/drawingml/2006/main" r:embed="R797eab6758264e86">
+          <a:blip xmlns:r="http://schemas.openxmlformats.org/officeDocument/2006/relationships" xmlns:a="http://schemas.openxmlformats.org/drawingml/2006/main" r:embed="R9f1f31a0465f44bb">
             <a:alphaModFix/>
           </a:blip>
           <a:srcRect xmlns:a="http://schemas.openxmlformats.org/drawingml/2006/main" l="0" t="0" r="0" b="0"/>
@@ -18376,7 +18270,7 @@
     <p:bg>
       <p:bgPr>
         <a:blipFill xmlns:a="http://schemas.openxmlformats.org/drawingml/2006/main">
-          <a:blip xmlns:r="http://schemas.openxmlformats.org/officeDocument/2006/relationships" r:embed="R988cdc21e4264590">
+          <a:blip xmlns:r="http://schemas.openxmlformats.org/officeDocument/2006/relationships" r:embed="R1b9117fd61e44f66">
             <a:alphaModFix/>
           </a:blip>
           <a:stretch>
@@ -19009,7 +18903,7 @@
           <p:nvPr/>
         </p:nvPicPr>
         <p:blipFill rotWithShape="1">
-          <a:blip xmlns:r="http://schemas.openxmlformats.org/officeDocument/2006/relationships" xmlns:a="http://schemas.openxmlformats.org/drawingml/2006/main" r:embed="Racb73d530d844275">
+          <a:blip xmlns:r="http://schemas.openxmlformats.org/officeDocument/2006/relationships" xmlns:a="http://schemas.openxmlformats.org/drawingml/2006/main" r:embed="Rde23698e70fe4e6e">
             <a:alphaModFix/>
           </a:blip>
           <a:srcRect xmlns:a="http://schemas.openxmlformats.org/drawingml/2006/main" l="0" t="0" r="0" b="0"/>
@@ -21665,7 +21559,7 @@
           <p:nvPr/>
         </p:nvPicPr>
         <p:blipFill rotWithShape="1">
-          <a:blip xmlns:r="http://schemas.openxmlformats.org/officeDocument/2006/relationships" xmlns:a="http://schemas.openxmlformats.org/drawingml/2006/main" r:embed="R2bcb73d178d1458a">
+          <a:blip xmlns:r="http://schemas.openxmlformats.org/officeDocument/2006/relationships" xmlns:a="http://schemas.openxmlformats.org/drawingml/2006/main" r:embed="R14fe23edd4e4446f">
             <a:alphaModFix/>
           </a:blip>
           <a:srcRect xmlns:a="http://schemas.openxmlformats.org/drawingml/2006/main" l="0" t="0" r="0" b="0"/>
@@ -21695,7 +21589,7 @@
     <p:bg>
       <p:bgPr>
         <a:blipFill xmlns:a="http://schemas.openxmlformats.org/drawingml/2006/main">
-          <a:blip xmlns:r="http://schemas.openxmlformats.org/officeDocument/2006/relationships" r:embed="R9ea97a0d6c4f422a">
+          <a:blip xmlns:r="http://schemas.openxmlformats.org/officeDocument/2006/relationships" r:embed="R57525fd96617442a">
             <a:alphaModFix/>
           </a:blip>
           <a:stretch>
@@ -22539,7 +22433,7 @@
           <p:nvPr/>
         </p:nvPicPr>
         <p:blipFill rotWithShape="1">
-          <a:blip xmlns:r="http://schemas.openxmlformats.org/officeDocument/2006/relationships" xmlns:a="http://schemas.openxmlformats.org/drawingml/2006/main" r:embed="Rdad6c3cb74674617">
+          <a:blip xmlns:r="http://schemas.openxmlformats.org/officeDocument/2006/relationships" xmlns:a="http://schemas.openxmlformats.org/drawingml/2006/main" r:embed="R438d5dfe167b4110">
             <a:alphaModFix/>
           </a:blip>
           <a:srcRect xmlns:a="http://schemas.openxmlformats.org/drawingml/2006/main" l="0" t="0" r="0" b="0"/>
@@ -22569,7 +22463,7 @@
     <p:bg>
       <p:bgPr>
         <a:blipFill xmlns:a="http://schemas.openxmlformats.org/drawingml/2006/main">
-          <a:blip xmlns:r="http://schemas.openxmlformats.org/officeDocument/2006/relationships" r:embed="R1bfa5d5398b44cbe">
+          <a:blip xmlns:r="http://schemas.openxmlformats.org/officeDocument/2006/relationships" r:embed="Ra1d92204151f4203">
             <a:alphaModFix/>
           </a:blip>
           <a:stretch>
@@ -23517,7 +23411,7 @@
           <p:nvPr/>
         </p:nvPicPr>
         <p:blipFill rotWithShape="1">
-          <a:blip xmlns:r="http://schemas.openxmlformats.org/officeDocument/2006/relationships" xmlns:a="http://schemas.openxmlformats.org/drawingml/2006/main" r:embed="R96fb3619757f4e26">
+          <a:blip xmlns:r="http://schemas.openxmlformats.org/officeDocument/2006/relationships" xmlns:a="http://schemas.openxmlformats.org/drawingml/2006/main" r:embed="Rc6279d0a114842e1">
             <a:alphaModFix/>
           </a:blip>
           <a:srcRect xmlns:a="http://schemas.openxmlformats.org/drawingml/2006/main" l="0" t="0" r="0" b="0"/>
@@ -23547,7 +23441,7 @@
     <p:bg>
       <p:bgPr>
         <a:blipFill xmlns:a="http://schemas.openxmlformats.org/drawingml/2006/main">
-          <a:blip xmlns:r="http://schemas.openxmlformats.org/officeDocument/2006/relationships" r:embed="R38c878bf8ed541d6">
+          <a:blip xmlns:r="http://schemas.openxmlformats.org/officeDocument/2006/relationships" r:embed="Ra9e46c8ac4914e0e">
             <a:alphaModFix/>
           </a:blip>
           <a:stretch>
@@ -24008,7 +23902,7 @@
           <p:nvPr/>
         </p:nvPicPr>
         <p:blipFill rotWithShape="1">
-          <a:blip xmlns:r="http://schemas.openxmlformats.org/officeDocument/2006/relationships" xmlns:a="http://schemas.openxmlformats.org/drawingml/2006/main" r:embed="R57e795fc0c9141fe">
+          <a:blip xmlns:r="http://schemas.openxmlformats.org/officeDocument/2006/relationships" xmlns:a="http://schemas.openxmlformats.org/drawingml/2006/main" r:embed="Rec86d0c9600d4720">
             <a:alphaModFix/>
           </a:blip>
           <a:srcRect xmlns:a="http://schemas.openxmlformats.org/drawingml/2006/main" l="0" t="0" r="0" b="0"/>
@@ -25720,22 +25614,22 @@
   </p:cSld>
   <p:clrMap bg1="lt1" tx1="dk1" bg2="dk2" tx2="lt2" accent1="accent1" accent2="accent2" accent3="accent3" accent4="accent4" accent5="accent5" accent6="accent6" hlink="hlink" folHlink="folHlink"/>
   <p:sldLayoutIdLst>
-    <p:sldLayoutId xmlns:r="http://schemas.openxmlformats.org/officeDocument/2006/relationships" id="2147483649" r:id="R1e252028f561427f"/>
-    <p:sldLayoutId xmlns:r="http://schemas.openxmlformats.org/officeDocument/2006/relationships" id="2147483650" r:id="Rbbeffc41be9d4c29"/>
-    <p:sldLayoutId xmlns:r="http://schemas.openxmlformats.org/officeDocument/2006/relationships" id="2147483651" r:id="R7d489853dda54cfa"/>
-    <p:sldLayoutId xmlns:r="http://schemas.openxmlformats.org/officeDocument/2006/relationships" id="2147483652" r:id="Rc2460c23c6de4ee5"/>
-    <p:sldLayoutId xmlns:r="http://schemas.openxmlformats.org/officeDocument/2006/relationships" id="2147483653" r:id="R075d998416814c51"/>
-    <p:sldLayoutId xmlns:r="http://schemas.openxmlformats.org/officeDocument/2006/relationships" id="2147483654" r:id="Ra7366f0782fc48da"/>
-    <p:sldLayoutId xmlns:r="http://schemas.openxmlformats.org/officeDocument/2006/relationships" id="2147483655" r:id="R50b48123f69a4026"/>
-    <p:sldLayoutId xmlns:r="http://schemas.openxmlformats.org/officeDocument/2006/relationships" id="2147483656" r:id="R8869ab5575744fda"/>
-    <p:sldLayoutId xmlns:r="http://schemas.openxmlformats.org/officeDocument/2006/relationships" id="2147483657" r:id="R48a689b32b804235"/>
-    <p:sldLayoutId xmlns:r="http://schemas.openxmlformats.org/officeDocument/2006/relationships" id="2147483658" r:id="Rfbf0f750bb9a4fcd"/>
-    <p:sldLayoutId xmlns:r="http://schemas.openxmlformats.org/officeDocument/2006/relationships" id="2147483659" r:id="R6b878557f3a84a2d"/>
-    <p:sldLayoutId xmlns:r="http://schemas.openxmlformats.org/officeDocument/2006/relationships" id="2147483660" r:id="Rcd1d596c90094179"/>
-    <p:sldLayoutId xmlns:r="http://schemas.openxmlformats.org/officeDocument/2006/relationships" id="2147483661" r:id="Re78bc3a820254d0d"/>
-    <p:sldLayoutId xmlns:r="http://schemas.openxmlformats.org/officeDocument/2006/relationships" id="2147483662" r:id="Ra34316d30fc14daf"/>
-    <p:sldLayoutId xmlns:r="http://schemas.openxmlformats.org/officeDocument/2006/relationships" id="2147483663" r:id="R2fdcb3cf9694432a"/>
-    <p:sldLayoutId xmlns:r="http://schemas.openxmlformats.org/officeDocument/2006/relationships" id="2147483664" r:id="R8a5f21e6a06c41d2"/>
+    <p:sldLayoutId xmlns:r="http://schemas.openxmlformats.org/officeDocument/2006/relationships" id="2147483649" r:id="R070ff2da4d944156"/>
+    <p:sldLayoutId xmlns:r="http://schemas.openxmlformats.org/officeDocument/2006/relationships" id="2147483650" r:id="Rd3dd6dc3cdec42c1"/>
+    <p:sldLayoutId xmlns:r="http://schemas.openxmlformats.org/officeDocument/2006/relationships" id="2147483651" r:id="R7a677abec70149b3"/>
+    <p:sldLayoutId xmlns:r="http://schemas.openxmlformats.org/officeDocument/2006/relationships" id="2147483652" r:id="Re4a55b36f658492c"/>
+    <p:sldLayoutId xmlns:r="http://schemas.openxmlformats.org/officeDocument/2006/relationships" id="2147483653" r:id="Rf8970b4265c444dd"/>
+    <p:sldLayoutId xmlns:r="http://schemas.openxmlformats.org/officeDocument/2006/relationships" id="2147483654" r:id="R6d6f2b968ec94bef"/>
+    <p:sldLayoutId xmlns:r="http://schemas.openxmlformats.org/officeDocument/2006/relationships" id="2147483655" r:id="R3fc7cfa96ab441f6"/>
+    <p:sldLayoutId xmlns:r="http://schemas.openxmlformats.org/officeDocument/2006/relationships" id="2147483656" r:id="R28af136d12e74d1a"/>
+    <p:sldLayoutId xmlns:r="http://schemas.openxmlformats.org/officeDocument/2006/relationships" id="2147483657" r:id="R14305fcb7ff84d6a"/>
+    <p:sldLayoutId xmlns:r="http://schemas.openxmlformats.org/officeDocument/2006/relationships" id="2147483658" r:id="R9d31cdc19f8e41b7"/>
+    <p:sldLayoutId xmlns:r="http://schemas.openxmlformats.org/officeDocument/2006/relationships" id="2147483659" r:id="Rfb3826a1820d4fb9"/>
+    <p:sldLayoutId xmlns:r="http://schemas.openxmlformats.org/officeDocument/2006/relationships" id="2147483660" r:id="R4ba4fe5800f2463f"/>
+    <p:sldLayoutId xmlns:r="http://schemas.openxmlformats.org/officeDocument/2006/relationships" id="2147483661" r:id="Rd3448cb120884759"/>
+    <p:sldLayoutId xmlns:r="http://schemas.openxmlformats.org/officeDocument/2006/relationships" id="2147483662" r:id="R1efaf594fc6142e7"/>
+    <p:sldLayoutId xmlns:r="http://schemas.openxmlformats.org/officeDocument/2006/relationships" id="2147483663" r:id="R399d4f51fa014256"/>
+    <p:sldLayoutId xmlns:r="http://schemas.openxmlformats.org/officeDocument/2006/relationships" id="2147483664" r:id="Rbc600858ad0a4bbd"/>
   </p:sldLayoutIdLst>
   <p:hf hdr="0" ftr="0" dt="0"/>
   <p:txStyles>
@@ -27928,7 +27822,7 @@
           <p:nvPr/>
         </p:nvPicPr>
         <p:blipFill rotWithShape="1">
-          <a:blip xmlns:r="http://schemas.openxmlformats.org/officeDocument/2006/relationships" xmlns:a="http://schemas.openxmlformats.org/drawingml/2006/main" r:embed="R06ee0bfa8f6b4a4d">
+          <a:blip xmlns:r="http://schemas.openxmlformats.org/officeDocument/2006/relationships" xmlns:a="http://schemas.openxmlformats.org/drawingml/2006/main" r:embed="R61f1236d4ec24f63">
             <a:alphaModFix/>
           </a:blip>
           <a:srcRect xmlns:a="http://schemas.openxmlformats.org/drawingml/2006/main" l="0" t="0" r="0" b="0"/>
@@ -27951,19 +27845,19 @@
   </p:cSld>
   <p:clrMap bg1="lt1" tx1="dk1" bg2="dk2" tx2="lt2" accent1="accent1" accent2="accent2" accent3="accent3" accent4="accent4" accent5="accent5" accent6="accent6" hlink="hlink" folHlink="folHlink"/>
   <p:sldLayoutIdLst>
-    <p:sldLayoutId xmlns:r="http://schemas.openxmlformats.org/officeDocument/2006/relationships" id="2147483666" r:id="Re8cce9f294644c6a"/>
-    <p:sldLayoutId xmlns:r="http://schemas.openxmlformats.org/officeDocument/2006/relationships" id="2147483667" r:id="R78af0a88c4d04b7e"/>
-    <p:sldLayoutId xmlns:r="http://schemas.openxmlformats.org/officeDocument/2006/relationships" id="2147483668" r:id="R1f82c38f286d4f3d"/>
-    <p:sldLayoutId xmlns:r="http://schemas.openxmlformats.org/officeDocument/2006/relationships" id="2147483669" r:id="R0446a0f9eae049bc"/>
-    <p:sldLayoutId xmlns:r="http://schemas.openxmlformats.org/officeDocument/2006/relationships" id="2147483670" r:id="R6ad2cb4553dc43ae"/>
-    <p:sldLayoutId xmlns:r="http://schemas.openxmlformats.org/officeDocument/2006/relationships" id="2147483671" r:id="Rb091d5f74f874b9d"/>
-    <p:sldLayoutId xmlns:r="http://schemas.openxmlformats.org/officeDocument/2006/relationships" id="2147483672" r:id="R50075ae6bb724ea0"/>
-    <p:sldLayoutId xmlns:r="http://schemas.openxmlformats.org/officeDocument/2006/relationships" id="2147483673" r:id="R2131b2fff8294471"/>
-    <p:sldLayoutId xmlns:r="http://schemas.openxmlformats.org/officeDocument/2006/relationships" id="2147483674" r:id="Ree27d22a0ab1418e"/>
-    <p:sldLayoutId xmlns:r="http://schemas.openxmlformats.org/officeDocument/2006/relationships" id="2147483675" r:id="R6bc234986d0c462f"/>
-    <p:sldLayoutId xmlns:r="http://schemas.openxmlformats.org/officeDocument/2006/relationships" id="2147483676" r:id="R17e9c0f3d0114bcb"/>
-    <p:sldLayoutId xmlns:r="http://schemas.openxmlformats.org/officeDocument/2006/relationships" id="2147483677" r:id="R6bf3860bbfc84dec"/>
-    <p:sldLayoutId xmlns:r="http://schemas.openxmlformats.org/officeDocument/2006/relationships" id="2147483678" r:id="R70b634836a1a4770"/>
+    <p:sldLayoutId xmlns:r="http://schemas.openxmlformats.org/officeDocument/2006/relationships" id="2147483666" r:id="Rd55ee1177f024844"/>
+    <p:sldLayoutId xmlns:r="http://schemas.openxmlformats.org/officeDocument/2006/relationships" id="2147483667" r:id="R18428e40ce954059"/>
+    <p:sldLayoutId xmlns:r="http://schemas.openxmlformats.org/officeDocument/2006/relationships" id="2147483668" r:id="R04bfd3c21c124351"/>
+    <p:sldLayoutId xmlns:r="http://schemas.openxmlformats.org/officeDocument/2006/relationships" id="2147483669" r:id="R1721c357195744b1"/>
+    <p:sldLayoutId xmlns:r="http://schemas.openxmlformats.org/officeDocument/2006/relationships" id="2147483670" r:id="R6b2ff1f7bd034e43"/>
+    <p:sldLayoutId xmlns:r="http://schemas.openxmlformats.org/officeDocument/2006/relationships" id="2147483671" r:id="R354981e428234b45"/>
+    <p:sldLayoutId xmlns:r="http://schemas.openxmlformats.org/officeDocument/2006/relationships" id="2147483672" r:id="R5ff7886dc4984a9c"/>
+    <p:sldLayoutId xmlns:r="http://schemas.openxmlformats.org/officeDocument/2006/relationships" id="2147483673" r:id="R964758be84834f04"/>
+    <p:sldLayoutId xmlns:r="http://schemas.openxmlformats.org/officeDocument/2006/relationships" id="2147483674" r:id="R6976709262a143c1"/>
+    <p:sldLayoutId xmlns:r="http://schemas.openxmlformats.org/officeDocument/2006/relationships" id="2147483675" r:id="Rf6d61a31abd646e8"/>
+    <p:sldLayoutId xmlns:r="http://schemas.openxmlformats.org/officeDocument/2006/relationships" id="2147483676" r:id="R97268f571b874de3"/>
+    <p:sldLayoutId xmlns:r="http://schemas.openxmlformats.org/officeDocument/2006/relationships" id="2147483677" r:id="R8fc6cad4f96141a8"/>
+    <p:sldLayoutId xmlns:r="http://schemas.openxmlformats.org/officeDocument/2006/relationships" id="2147483678" r:id="Rf7a67d1d757d432d"/>
   </p:sldLayoutIdLst>
   <p:hf hdr="0" ftr="0" dt="0"/>
   <p:txStyles>
@@ -29368,7 +29262,7 @@
           <a:lstStyle xmlns:a="http://schemas.openxmlformats.org/drawingml/2006/main"/>
           <a:p xmlns:a="http://schemas.openxmlformats.org/drawingml/2006/main">
             <a:r>
-              <a:t>Why this is useful to oneTBB at first glance</a:t>
+              <a:t>What the skill tells an agent today</a:t>
             </a:r>
           </a:p>
         </p:txBody>
@@ -29418,7 +29312,7 @@
                   <a:srgbClr val="000000"/>
                 </a:solidFill>
               </a:rPr>
-              <a:t> Match problems to composable patterns</a:t>
+              <a:t> Select the smallest correct oneTBB pattern</a:t>
             </a:r>
             <a:r>
               <a:rPr sz="1913">
@@ -29426,7 +29320,7 @@
                   <a:srgbClr val="000000"/>
                 </a:solidFill>
               </a:rPr>
-              <a:t> — Agents choose loops, reductions, scans, pipelines, flow graph, task groups, or arenas by workload shape.</a:t>
+              <a:t> — Use the semantic shape of the work instead of writing explicit threads.</a:t>
             </a:r>
           </a:p>
           <a:p xmlns:a="http://schemas.openxmlformats.org/drawingml/2006/main">
@@ -29447,7 +29341,7 @@
                   <a:srgbClr val="000000"/>
                 </a:solidFill>
               </a:rPr>
-              <a:t> Expose concurrency contracts</a:t>
+              <a:t> Make state and ordering explicit</a:t>
             </a:r>
             <a:r>
               <a:rPr sz="1913">
@@ -29455,7 +29349,7 @@
                   <a:srgbClr val="000000"/>
                 </a:solidFill>
               </a:rPr>
-              <a:t> — Mutable state, ordering, cancellation, exceptions, blocking calls, and external pools are named before parallelizing.</a:t>
+              <a:t> — Partition-local temporaries beat shared mutation; join-node semantics must match correlation needs.</a:t>
             </a:r>
           </a:p>
           <a:p xmlns:a="http://schemas.openxmlformats.org/drawingml/2006/main">
@@ -29476,7 +29370,7 @@
                   <a:srgbClr val="000000"/>
                 </a:solidFill>
               </a:rPr>
-              <a:t> Bound resource ownership</a:t>
+              <a:t> Control nested runtimes</a:t>
             </a:r>
             <a:r>
               <a:rPr sz="1913">
@@ -29484,7 +29378,7 @@
                   <a:srgbClr val="000000"/>
                 </a:solidFill>
               </a:rPr>
-              <a:t> — Flow-graph admission, stage concurrency, and capacity return become correctness requirements.</a:t>
+              <a:t> — task_arena/global_control integrate oneTBB with thread pools, OpenMP, and other runtimes.</a:t>
             </a:r>
           </a:p>
           <a:p xmlns:a="http://schemas.openxmlformats.org/drawingml/2006/main">
@@ -29505,7 +29399,7 @@
                   <a:srgbClr val="000000"/>
                 </a:solidFill>
               </a:rPr>
-              <a:t> Tune only from evidence</a:t>
+              <a:t> Treat failures as first-class</a:t>
             </a:r>
             <a:r>
               <a:rPr sz="1913">
@@ -29513,7 +29407,36 @@
                   <a:srgbClr val="000000"/>
                 </a:solidFill>
               </a:rPr>
-              <a:t> — Grainsize, affinity, arenas, and concurrency are measured against a serial reference and real CPU limits.</a:t>
+              <a:t> — Tests cover races, long-run resource bounds, cancellation, exceptions, duplicates, gaps, and ordering.</a:t>
+            </a:r>
+          </a:p>
+          <a:p xmlns:a="http://schemas.openxmlformats.org/drawingml/2006/main">
+            <a:pPr marL="30" indent="-18">
+              <a:spcAft>
+                <a:spcPts val="10"/>
+              </a:spcAft>
+              <a:buChar char="•"/>
+              <a:defRPr sz="1913">
+                <a:solidFill>
+                  <a:srgbClr val="000000"/>
+                </a:solidFill>
+              </a:defRPr>
+            </a:pPr>
+            <a:r>
+              <a:rPr sz="1913" b="1">
+                <a:solidFill>
+                  <a:srgbClr val="000000"/>
+                </a:solidFill>
+              </a:rPr>
+              <a:t> Keep GPU work elsewhere</a:t>
+            </a:r>
+            <a:r>
+              <a:rPr sz="1913">
+                <a:solidFill>
+                  <a:srgbClr val="000000"/>
+                </a:solidFill>
+              </a:rPr>
+              <a:t> — Device offload routes to SYCL or oneDPL guidance.</a:t>
             </a:r>
           </a:p>
         </p:txBody>
@@ -29605,7 +29528,7 @@
           <a:lstStyle xmlns:a="http://schemas.openxmlformats.org/drawingml/2006/main"/>
           <a:p xmlns:a="http://schemas.openxmlformats.org/drawingml/2006/main">
             <a:r>
-              <a:t>What the skill tells an agent today</a:t>
+              <a:t>Evaluation inventory: all 7 tasks implemented</a:t>
             </a:r>
           </a:p>
         </p:txBody>
@@ -29655,7 +29578,7 @@
                   <a:srgbClr val="000000"/>
                 </a:solidFill>
               </a:rPr>
-              <a:t> Select the smallest correct oneTBB pattern</a:t>
+              <a:t> Patterns</a:t>
             </a:r>
             <a:r>
               <a:rPr sz="1913">
@@ -29663,7 +29586,7 @@
                   <a:srgbClr val="000000"/>
                 </a:solidFill>
               </a:rPr>
-              <a:t> — Use the semantic shape of the work instead of writing explicit threads.</a:t>
+              <a:t> — Histogram local aggregation; stable compaction scan; bounded image flow graph.</a:t>
             </a:r>
           </a:p>
           <a:p xmlns:a="http://schemas.openxmlformats.org/drawingml/2006/main">
@@ -29684,7 +29607,7 @@
                   <a:srgbClr val="000000"/>
                 </a:solidFill>
               </a:rPr>
-              <a:t> Make state and ordering explicit</a:t>
+              <a:t> Runtime composition</a:t>
             </a:r>
             <a:r>
               <a:rPr sz="1913">
@@ -29692,7 +29615,7 @@
                   <a:srgbClr val="000000"/>
                 </a:solidFill>
               </a:rPr>
-              <a:t> — Partition-local temporaries beat shared mutation; join-node semantics must match correlation needs.</a:t>
+              <a:t> — Nested thread-pool arena; cancellation and exception propagation.</a:t>
             </a:r>
           </a:p>
           <a:p xmlns:a="http://schemas.openxmlformats.org/drawingml/2006/main">
@@ -29713,7 +29636,7 @@
                   <a:srgbClr val="000000"/>
                 </a:solidFill>
               </a:rPr>
-              <a:t> Control nested runtimes</a:t>
+              <a:t> Tuning</a:t>
             </a:r>
             <a:r>
               <a:rPr sz="1913">
@@ -29721,7 +29644,7 @@
                   <a:srgbClr val="000000"/>
                 </a:solidFill>
               </a:rPr>
-              <a:t> — task_arena/global_control integrate oneTBB with thread pools, OpenMP, and other runtimes.</a:t>
+              <a:t> — Grainsize and affinity regression with measurable controls.</a:t>
             </a:r>
           </a:p>
           <a:p xmlns:a="http://schemas.openxmlformats.org/drawingml/2006/main">
@@ -29742,7 +29665,7 @@
                   <a:srgbClr val="000000"/>
                 </a:solidFill>
               </a:rPr>
-              <a:t> Treat failures as first-class</a:t>
+              <a:t> Incident evidence</a:t>
             </a:r>
             <a:r>
               <a:rPr sz="1913">
@@ -29750,7 +29673,7 @@
                   <a:srgbClr val="000000"/>
                 </a:solidFill>
               </a:rPr>
-              <a:t> — Tests cover races, long-run resource bounds, cancellation, exceptions, duplicates, gaps, and ordering.</a:t>
+              <a:t> — Join-node ordering is sourced from a maintainer incident.</a:t>
             </a:r>
           </a:p>
           <a:p xmlns:a="http://schemas.openxmlformats.org/drawingml/2006/main">
@@ -29771,7 +29694,7 @@
                   <a:srgbClr val="000000"/>
                 </a:solidFill>
               </a:rPr>
-              <a:t> Keep GPU work elsewhere</a:t>
+              <a:t> What remains</a:t>
             </a:r>
             <a:r>
               <a:rPr sz="1913">
@@ -29779,7 +29702,7 @@
                   <a:srgbClr val="000000"/>
                 </a:solidFill>
               </a:rPr>
-              <a:t> — Device offload routes to SYCL or oneDPL guidance.</a:t>
+              <a:t> — Human ownership and matched promotion trials — not more task-count filling.</a:t>
             </a:r>
           </a:p>
         </p:txBody>
@@ -29871,7 +29794,7 @@
           <a:lstStyle xmlns:a="http://schemas.openxmlformats.org/drawingml/2006/main"/>
           <a:p xmlns:a="http://schemas.openxmlformats.org/drawingml/2006/main">
             <a:r>
-              <a:t>Evaluation inventory: all 7 tasks implemented</a:t>
+              <a:t>How we chose the content</a:t>
             </a:r>
           </a:p>
         </p:txBody>
@@ -29921,7 +29844,7 @@
                   <a:srgbClr val="000000"/>
                 </a:solidFill>
               </a:rPr>
-              <a:t> Patterns</a:t>
+              <a:t> Official project guidance</a:t>
             </a:r>
             <a:r>
               <a:rPr sz="1913">
@@ -29929,7 +29852,7 @@
                   <a:srgbClr val="000000"/>
                 </a:solidFill>
               </a:rPr>
-              <a:t> — Histogram local aggregation; stable compaction scan; bounded image flow graph.</a:t>
+              <a:t> — API docs, examples, tests, migration notes, scheduler behavior, and ownership files.</a:t>
             </a:r>
           </a:p>
           <a:p xmlns:a="http://schemas.openxmlformats.org/drawingml/2006/main">
@@ -29950,7 +29873,7 @@
                   <a:srgbClr val="000000"/>
                 </a:solidFill>
               </a:rPr>
-              <a:t> Runtime composition</a:t>
+              <a:t> Failure-shaped coverage</a:t>
             </a:r>
             <a:r>
               <a:rPr sz="1913">
@@ -29958,7 +29881,7 @@
                   <a:srgbClr val="000000"/>
                 </a:solidFill>
               </a:rPr>
-              <a:t> — Nested thread-pool arena; cancellation and exception propagation.</a:t>
+              <a:t> — Shared state, unbounded flow graphs, oversubscription, affinity folklore, cancellation, and message correlation.</a:t>
             </a:r>
           </a:p>
           <a:p xmlns:a="http://schemas.openxmlformats.org/drawingml/2006/main">
@@ -29979,7 +29902,7 @@
                   <a:srgbClr val="000000"/>
                 </a:solidFill>
               </a:rPr>
-              <a:t> Tuning</a:t>
+              <a:t> Executable correctness</a:t>
             </a:r>
             <a:r>
               <a:rPr sz="1913">
@@ -29987,7 +29910,7 @@
                   <a:srgbClr val="000000"/>
                 </a:solidFill>
               </a:rPr>
-              <a:t> — Grainsize and affinity regression with measurable controls.</a:t>
+              <a:t> — Each task has deterministic success criteria; two tasks retain measured quality headroom.</a:t>
             </a:r>
           </a:p>
           <a:p xmlns:a="http://schemas.openxmlformats.org/drawingml/2006/main">
@@ -30008,7 +29931,7 @@
                   <a:srgbClr val="000000"/>
                 </a:solidFill>
               </a:rPr>
-              <a:t> Incident evidence</a:t>
+              <a:t> Clear boundaries</a:t>
             </a:r>
             <a:r>
               <a:rPr sz="1913">
@@ -30016,36 +29939,7 @@
                   <a:srgbClr val="000000"/>
                 </a:solidFill>
               </a:rPr>
-              <a:t> — Join-node ordering is sourced from a maintainer incident.</a:t>
-            </a:r>
-          </a:p>
-          <a:p xmlns:a="http://schemas.openxmlformats.org/drawingml/2006/main">
-            <a:pPr marL="30" indent="-18">
-              <a:spcAft>
-                <a:spcPts val="10"/>
-              </a:spcAft>
-              <a:buChar char="•"/>
-              <a:defRPr sz="1913">
-                <a:solidFill>
-                  <a:srgbClr val="000000"/>
-                </a:solidFill>
-              </a:defRPr>
-            </a:pPr>
-            <a:r>
-              <a:rPr sz="1913" b="1">
-                <a:solidFill>
-                  <a:srgbClr val="000000"/>
-                </a:solidFill>
-              </a:rPr>
-              <a:t> What remains</a:t>
-            </a:r>
-            <a:r>
-              <a:rPr sz="1913">
-                <a:solidFill>
-                  <a:srgbClr val="000000"/>
-                </a:solidFill>
-              </a:rPr>
-              <a:t> — Human ownership and matched promotion trials — not more task-count filling.</a:t>
+              <a:t> — The skill does not replace the API reference or claim GPU-offload coverage.</a:t>
             </a:r>
           </a:p>
         </p:txBody>
@@ -30137,7 +30031,7 @@
           <a:lstStyle xmlns:a="http://schemas.openxmlformats.org/drawingml/2006/main"/>
           <a:p xmlns:a="http://schemas.openxmlformats.org/drawingml/2006/main">
             <a:r>
-              <a:t>How we chose the content</a:t>
+              <a:t>What project ownership would look like</a:t>
             </a:r>
           </a:p>
         </p:txBody>
@@ -30187,7 +30081,7 @@
                   <a:srgbClr val="000000"/>
                 </a:solidFill>
               </a:rPr>
-              <a:t> Official project guidance</a:t>
+              <a:t> Review the pattern-selection and runtime guidance</a:t>
             </a:r>
             <a:r>
               <a:rPr sz="1913">
@@ -30195,7 +30089,7 @@
                   <a:srgbClr val="000000"/>
                 </a:solidFill>
               </a:rPr>
-              <a:t> — API docs, examples, tests, migration notes, scheduler behavior, and ownership files.</a:t>
+              <a:t> — Especially flow-graph backpressure, nested parallelism, join semantics, affinity, and migration.</a:t>
             </a:r>
           </a:p>
           <a:p xmlns:a="http://schemas.openxmlformats.org/drawingml/2006/main">
@@ -30216,7 +30110,7 @@
                   <a:srgbClr val="000000"/>
                 </a:solidFill>
               </a:rPr>
-              <a:t> Failure-shaped coverage</a:t>
+              <a:t> Keep examples grounded</a:t>
             </a:r>
             <a:r>
               <a:rPr sz="1913">
@@ -30224,7 +30118,7 @@
                   <a:srgbClr val="000000"/>
                 </a:solidFill>
               </a:rPr>
-              <a:t> — Shared state, unbounded flow graphs, oversubscription, affinity folklore, cancellation, and message correlation.</a:t>
+              <a:t> — Replace generic advice with project-supported idioms and tests where possible.</a:t>
             </a:r>
           </a:p>
           <a:p xmlns:a="http://schemas.openxmlformats.org/drawingml/2006/main">
@@ -30245,7 +30139,7 @@
                   <a:srgbClr val="000000"/>
                 </a:solidFill>
               </a:rPr>
-              <a:t> Executable correctness</a:t>
+              <a:t> Calibrate, do not inflate</a:t>
             </a:r>
             <a:r>
               <a:rPr sz="1913">
@@ -30253,7 +30147,7 @@
                   <a:srgbClr val="000000"/>
                 </a:solidFill>
               </a:rPr>
-              <a:t> — Each task has deterministic success criteria; two tasks retain measured quality headroom.</a:t>
+              <a:t> — The suite is already full; focus next on maintainer approval and whether the tasks discriminate.</a:t>
             </a:r>
           </a:p>
           <a:p xmlns:a="http://schemas.openxmlformats.org/drawingml/2006/main">
@@ -30274,7 +30168,7 @@
                   <a:srgbClr val="000000"/>
                 </a:solidFill>
               </a:rPr>
-              <a:t> Clear boundaries</a:t>
+              <a:t> UXL keeps the machinery</a:t>
             </a:r>
             <a:r>
               <a:rPr sz="1913">
@@ -30282,7 +30176,7 @@
                   <a:srgbClr val="000000"/>
                 </a:solidFill>
               </a:rPr>
-              <a:t> — The skill does not replace the API reference or claim GPU-offload coverage.</a:t>
+              <a:t> — Harbor, dashboards, matched comparisons, hosted CI, and shared validation remain centralized.</a:t>
             </a:r>
           </a:p>
         </p:txBody>
@@ -30374,243 +30268,6 @@
           <a:lstStyle xmlns:a="http://schemas.openxmlformats.org/drawingml/2006/main"/>
           <a:p xmlns:a="http://schemas.openxmlformats.org/drawingml/2006/main">
             <a:r>
-              <a:t>What project ownership would look like</a:t>
-            </a:r>
-          </a:p>
-        </p:txBody>
-      </p:sp>
-      <p:sp>
-        <p:nvSpPr>
-          <p:cNvPr id="3" name="Content Placeholder 2">
-            <a:extLst xmlns:a="http://schemas.openxmlformats.org/drawingml/2006/main">
-              <a:ext uri="{FF2B5EF4-FFF2-40B4-BE49-F238E27FC236}">
-                <a16:creationId xmlns:a16="http://schemas.microsoft.com/office/drawing/2014/main" id="{ECF5C9F1-2691-0BC9-F1E1-01CECB857FE3}"/>
-              </a:ext>
-            </a:extLst>
-          </p:cNvPr>
-          <p:cNvSpPr>
-            <a:spLocks xmlns:a="http://schemas.openxmlformats.org/drawingml/2006/main" noGrp="1"/>
-          </p:cNvSpPr>
-          <p:nvPr>
-            <p:ph type="body" idx="1"/>
-          </p:nvPr>
-        </p:nvSpPr>
-        <p:spPr>
-          <a:xfrm xmlns:a="http://schemas.openxmlformats.org/drawingml/2006/main">
-            <a:off x="838200" y="1825625"/>
-            <a:ext cx="10515600" cy="4351200"/>
-          </a:xfrm>
-        </p:spPr>
-        <p:txBody>
-          <a:bodyPr xmlns:a="http://schemas.openxmlformats.org/drawingml/2006/main" wrap="square" anchor="t">
-            <a:normAutofit fontScale="100000"/>
-          </a:bodyPr>
-          <a:lstStyle xmlns:a="http://schemas.openxmlformats.org/drawingml/2006/main"/>
-          <a:p xmlns:a="http://schemas.openxmlformats.org/drawingml/2006/main">
-            <a:pPr marL="30" indent="-18">
-              <a:spcAft>
-                <a:spcPts val="10"/>
-              </a:spcAft>
-              <a:buChar char="•"/>
-              <a:defRPr sz="1913">
-                <a:solidFill>
-                  <a:srgbClr val="000000"/>
-                </a:solidFill>
-              </a:defRPr>
-            </a:pPr>
-            <a:r>
-              <a:rPr sz="1913" b="1">
-                <a:solidFill>
-                  <a:srgbClr val="000000"/>
-                </a:solidFill>
-              </a:rPr>
-              <a:t> Review the pattern-selection and runtime guidance</a:t>
-            </a:r>
-            <a:r>
-              <a:rPr sz="1913">
-                <a:solidFill>
-                  <a:srgbClr val="000000"/>
-                </a:solidFill>
-              </a:rPr>
-              <a:t> — Especially flow-graph backpressure, nested parallelism, join semantics, affinity, and migration.</a:t>
-            </a:r>
-          </a:p>
-          <a:p xmlns:a="http://schemas.openxmlformats.org/drawingml/2006/main">
-            <a:pPr marL="30" indent="-18">
-              <a:spcAft>
-                <a:spcPts val="10"/>
-              </a:spcAft>
-              <a:buChar char="•"/>
-              <a:defRPr sz="1913">
-                <a:solidFill>
-                  <a:srgbClr val="000000"/>
-                </a:solidFill>
-              </a:defRPr>
-            </a:pPr>
-            <a:r>
-              <a:rPr sz="1913" b="1">
-                <a:solidFill>
-                  <a:srgbClr val="000000"/>
-                </a:solidFill>
-              </a:rPr>
-              <a:t> Keep examples grounded</a:t>
-            </a:r>
-            <a:r>
-              <a:rPr sz="1913">
-                <a:solidFill>
-                  <a:srgbClr val="000000"/>
-                </a:solidFill>
-              </a:rPr>
-              <a:t> — Replace generic advice with project-supported idioms and tests where possible.</a:t>
-            </a:r>
-          </a:p>
-          <a:p xmlns:a="http://schemas.openxmlformats.org/drawingml/2006/main">
-            <a:pPr marL="30" indent="-18">
-              <a:spcAft>
-                <a:spcPts val="10"/>
-              </a:spcAft>
-              <a:buChar char="•"/>
-              <a:defRPr sz="1913">
-                <a:solidFill>
-                  <a:srgbClr val="000000"/>
-                </a:solidFill>
-              </a:defRPr>
-            </a:pPr>
-            <a:r>
-              <a:rPr sz="1913" b="1">
-                <a:solidFill>
-                  <a:srgbClr val="000000"/>
-                </a:solidFill>
-              </a:rPr>
-              <a:t> Calibrate, do not inflate</a:t>
-            </a:r>
-            <a:r>
-              <a:rPr sz="1913">
-                <a:solidFill>
-                  <a:srgbClr val="000000"/>
-                </a:solidFill>
-              </a:rPr>
-              <a:t> — The suite is already full; focus next on maintainer approval and whether the tasks discriminate.</a:t>
-            </a:r>
-          </a:p>
-          <a:p xmlns:a="http://schemas.openxmlformats.org/drawingml/2006/main">
-            <a:pPr marL="30" indent="-18">
-              <a:spcAft>
-                <a:spcPts val="10"/>
-              </a:spcAft>
-              <a:buChar char="•"/>
-              <a:defRPr sz="1913">
-                <a:solidFill>
-                  <a:srgbClr val="000000"/>
-                </a:solidFill>
-              </a:defRPr>
-            </a:pPr>
-            <a:r>
-              <a:rPr sz="1913" b="1">
-                <a:solidFill>
-                  <a:srgbClr val="000000"/>
-                </a:solidFill>
-              </a:rPr>
-              <a:t> UXL keeps the machinery</a:t>
-            </a:r>
-            <a:r>
-              <a:rPr sz="1913">
-                <a:solidFill>
-                  <a:srgbClr val="000000"/>
-                </a:solidFill>
-              </a:rPr>
-              <a:t> — Harbor, dashboards, matched comparisons, hosted CI, and shared validation remain centralized.</a:t>
-            </a:r>
-          </a:p>
-        </p:txBody>
-      </p:sp>
-      <p:sp>
-        <p:nvSpPr>
-          <p:cNvPr id="7" name="TextBox 6">
-            <a:extLst xmlns:a="http://schemas.openxmlformats.org/drawingml/2006/main">
-              <a:ext uri="{FF2B5EF4-FFF2-40B4-BE49-F238E27FC236}">
-                <a16:creationId xmlns:a16="http://schemas.microsoft.com/office/drawing/2014/main" id="{E2E6F043-0F84-54F7-A567-6E5851801779}"/>
-              </a:ext>
-            </a:extLst>
-          </p:cNvPr>
-          <p:cNvSpPr>
-            <a:spLocks xmlns:a="http://schemas.openxmlformats.org/drawingml/2006/main" noGrp="1"/>
-          </p:cNvSpPr>
-          <p:nvPr/>
-        </p:nvSpPr>
-        <p:spPr>
-          <a:xfrm xmlns:a="http://schemas.openxmlformats.org/drawingml/2006/main">
-            <a:off x="696174" y="6338986"/>
-            <a:ext cx="284052" cy="307777"/>
-          </a:xfrm>
-          <a:prstGeom xmlns:a="http://schemas.openxmlformats.org/drawingml/2006/main" prst="rect">
-            <a:avLst/>
-          </a:prstGeom>
-          <a:noFill xmlns:a="http://schemas.openxmlformats.org/drawingml/2006/main"/>
-        </p:spPr>
-        <p:txBody>
-          <a:bodyPr xmlns:a="http://schemas.openxmlformats.org/drawingml/2006/main" wrap="none">
-            <a:spAutoFit/>
-          </a:bodyPr>
-          <a:lstStyle xmlns:a="http://schemas.openxmlformats.org/drawingml/2006/main"/>
-          <a:p xmlns:a="http://schemas.openxmlformats.org/drawingml/2006/main">
-            <a:r>
-              <a:t>6</a:t>
-            </a:r>
-          </a:p>
-        </p:txBody>
-      </p:sp>
-    </p:spTree>
-    <p:extLst>
-      <p:ext uri="{BB962C8B-B14F-4D97-AF65-F5344CB8AC3E}">
-        <p14:creationId xmlns:p14="http://schemas.microsoft.com/office/powerpoint/2010/main" val="1742728663"/>
-      </p:ext>
-    </p:extLst>
-  </p:cSld>
-</p:sld>
-</file>
-
-<file path=ppt/slides/slide7.xml><?xml version="1.0" encoding="utf-8"?>
-<p:sld xmlns:p="http://schemas.openxmlformats.org/presentationml/2006/main">
-  <p:cSld>
-    <p:spTree>
-      <p:nvGrpSpPr>
-        <p:cNvPr id="1" name=""/>
-        <p:cNvGrpSpPr/>
-        <p:nvPr/>
-      </p:nvGrpSpPr>
-      <p:grpSpPr>
-        <a:xfrm xmlns:a="http://schemas.openxmlformats.org/drawingml/2006/main"/>
-      </p:grpSpPr>
-      <p:sp>
-        <p:nvSpPr>
-          <p:cNvPr id="2" name="Title 1">
-            <a:extLst xmlns:a="http://schemas.openxmlformats.org/drawingml/2006/main">
-              <a:ext uri="{FF2B5EF4-FFF2-40B4-BE49-F238E27FC236}">
-                <a16:creationId xmlns:a16="http://schemas.microsoft.com/office/drawing/2014/main" id="{F64C2A24-546D-C55C-2C52-97A4957F67E0}"/>
-              </a:ext>
-            </a:extLst>
-          </p:cNvPr>
-          <p:cNvSpPr>
-            <a:spLocks xmlns:a="http://schemas.openxmlformats.org/drawingml/2006/main" noGrp="1"/>
-          </p:cNvSpPr>
-          <p:nvPr>
-            <p:ph type="title" idx="0"/>
-          </p:nvPr>
-        </p:nvSpPr>
-        <p:spPr>
-          <a:xfrm xmlns:a="http://schemas.openxmlformats.org/drawingml/2006/main">
-            <a:off x="838200" y="365125"/>
-            <a:ext cx="10515600" cy="1325700"/>
-          </a:xfrm>
-        </p:spPr>
-        <p:txBody>
-          <a:bodyPr xmlns:a="http://schemas.openxmlformats.org/drawingml/2006/main">
-            <a:normAutofit fontScale="100000"/>
-          </a:bodyPr>
-          <a:lstStyle xmlns:a="http://schemas.openxmlformats.org/drawingml/2006/main"/>
-          <a:p xmlns:a="http://schemas.openxmlformats.org/drawingml/2006/main">
-            <a:r>
               <a:t>A focused 30-minute maintainer review</a:t>
             </a:r>
           </a:p>
@@ -30821,7 +30478,7 @@
           <a:lstStyle xmlns:a="http://schemas.openxmlformats.org/drawingml/2006/main"/>
           <a:p xmlns:a="http://schemas.openxmlformats.org/drawingml/2006/main">
             <a:r>
-              <a:t>7</a:t>
+              <a:t>6</a:t>
             </a:r>
           </a:p>
         </p:txBody>

--- a/evaluation/dashboard/public/decks/uxl-onetbb-maintainer-briefing.pptx
+++ b/evaluation/dashboard/public/decks/uxl-onetbb-maintainer-briefing.pptx
@@ -2,19 +2,19 @@
 <file path=ppt/presentation.xml><?xml version="1.0" encoding="utf-8"?>
 <p:presentation xmlns:p="http://schemas.openxmlformats.org/presentationml/2006/main">
   <p:sldMasterIdLst>
-    <p:sldMasterId xmlns:r="http://schemas.openxmlformats.org/officeDocument/2006/relationships" id="2147483648" r:id="Rd070dea4b73749ba"/>
-    <p:sldMasterId xmlns:r="http://schemas.openxmlformats.org/officeDocument/2006/relationships" id="2147483665" r:id="Rf86e600c91084c3c"/>
+    <p:sldMasterId xmlns:r="http://schemas.openxmlformats.org/officeDocument/2006/relationships" id="2147483648" r:id="R43552249cc5d4c52"/>
+    <p:sldMasterId xmlns:r="http://schemas.openxmlformats.org/officeDocument/2006/relationships" id="2147483665" r:id="Rb34290015d124682"/>
   </p:sldMasterIdLst>
   <p:notesMasterIdLst>
-    <p:notesMasterId xmlns:r="http://schemas.openxmlformats.org/officeDocument/2006/relationships" r:id="R490919d763a641c3"/>
+    <p:notesMasterId xmlns:r="http://schemas.openxmlformats.org/officeDocument/2006/relationships" r:id="R29ae21e39d1a487e"/>
   </p:notesMasterIdLst>
   <p:sldIdLst>
-    <p:sldId xmlns:r="http://schemas.openxmlformats.org/officeDocument/2006/relationships" id="256" r:id="R511331e9b4fb47c1"/>
-    <p:sldId xmlns:r="http://schemas.openxmlformats.org/officeDocument/2006/relationships" id="257" r:id="Rfd4ca47b27654705"/>
-    <p:sldId xmlns:r="http://schemas.openxmlformats.org/officeDocument/2006/relationships" id="258" r:id="R8144af880dde4300"/>
-    <p:sldId xmlns:r="http://schemas.openxmlformats.org/officeDocument/2006/relationships" id="259" r:id="R85f891f736a546ff"/>
-    <p:sldId xmlns:r="http://schemas.openxmlformats.org/officeDocument/2006/relationships" id="260" r:id="R27a758ee80dd4a01"/>
-    <p:sldId xmlns:r="http://schemas.openxmlformats.org/officeDocument/2006/relationships" id="261" r:id="Rfbb711298fe34c5f"/>
+    <p:sldId xmlns:r="http://schemas.openxmlformats.org/officeDocument/2006/relationships" id="256" r:id="R845bdcc8437c4121"/>
+    <p:sldId xmlns:r="http://schemas.openxmlformats.org/officeDocument/2006/relationships" id="257" r:id="R2d002cf735d243eb"/>
+    <p:sldId xmlns:r="http://schemas.openxmlformats.org/officeDocument/2006/relationships" id="258" r:id="R7cd885163cde49c3"/>
+    <p:sldId xmlns:r="http://schemas.openxmlformats.org/officeDocument/2006/relationships" id="259" r:id="Rbf9c628ffd0549f2"/>
+    <p:sldId xmlns:r="http://schemas.openxmlformats.org/officeDocument/2006/relationships" id="260" r:id="R8e4ec3337e844208"/>
+    <p:sldId xmlns:r="http://schemas.openxmlformats.org/officeDocument/2006/relationships" id="261" r:id="Rfa62023225654884"/>
   </p:sldIdLst>
   <p:sldSz cx="12192000" cy="6858000"/>
   <p:notesSz cx="6858000" cy="9144000"/>
@@ -503,6 +503,11 @@
           </a:p>
           <a:p xmlns:a="http://schemas.openxmlformats.org/drawingml/2006/main">
             <a:r>
+              <a:t>- https://github.com/uxlfoundation/skills/blob/main/evaluation/harbor/EVALUATOR_POLICY.md</a:t>
+            </a:r>
+          </a:p>
+          <a:p xmlns:a="http://schemas.openxmlformats.org/drawingml/2006/main">
+            <a:r>
               <a:t>[/Sources]</a:t>
             </a:r>
           </a:p>
@@ -513,7 +518,22 @@
           </a:p>
           <a:p xmlns:a="http://schemas.openxmlformats.org/drawingml/2006/main">
             <a:r>
-              <a:t>Speaker cue: oneTBB skill: encode parallel design discipline</a:t>
+              <a:t>Presenter guidance</a:t>
+            </a:r>
+          </a:p>
+          <a:p xmlns:a="http://schemas.openxmlformats.org/drawingml/2006/main">
+            <a:r>
+              <a:t>Purpose: Introduce the draft oneTBB skill and its current evaluation coverage.</a:t>
+            </a:r>
+          </a:p>
+          <a:p xmlns:a="http://schemas.openxmlformats.org/drawingml/2006/main">
+            <a:r>
+              <a:t>Explain: The skill helps coding agents reason about parallel patterns, partitioning and grain size, shared state, flow-graph bounds, arenas, cancellation, and exception behavior.</a:t>
+            </a:r>
+          </a:p>
+          <a:p xmlns:a="http://schemas.openxmlformats.org/drawingml/2006/main">
+            <a:r>
+              <a:t>Emphasize: This is a UXL-authored starting point awaiting project review, not approved maintainer guidance.</a:t>
             </a:r>
           </a:p>
         </p:txBody>
@@ -608,6 +628,11 @@
           </a:p>
           <a:p xmlns:a="http://schemas.openxmlformats.org/drawingml/2006/main">
             <a:r>
+              <a:t>- https://github.com/uxlfoundation/skills/blob/main/evaluation/harbor/EVALUATOR_POLICY.md</a:t>
+            </a:r>
+          </a:p>
+          <a:p xmlns:a="http://schemas.openxmlformats.org/drawingml/2006/main">
+            <a:r>
               <a:t>[/Sources]</a:t>
             </a:r>
           </a:p>
@@ -618,7 +643,22 @@
           </a:p>
           <a:p xmlns:a="http://schemas.openxmlformats.org/drawingml/2006/main">
             <a:r>
-              <a:t>Speaker cue: What the skill tells an agent today</a:t>
+              <a:t>Presenter guidance</a:t>
+            </a:r>
+          </a:p>
+          <a:p xmlns:a="http://schemas.openxmlformats.org/drawingml/2006/main">
+            <a:r>
+              <a:t>Purpose: Walk through the behavior the skill asks an agent to follow today.</a:t>
+            </a:r>
+          </a:p>
+          <a:p xmlns:a="http://schemas.openxmlformats.org/drawingml/2006/main">
+            <a:r>
+              <a:t>Explain: The intended sequence is to choose the parallel pattern before tuning, isolate mutable state, justify grain and partitioner choices with evidence, and validate cancellation and exception paths.</a:t>
+            </a:r>
+          </a:p>
+          <a:p xmlns:a="http://schemas.openxmlformats.org/drawingml/2006/main">
+            <a:r>
+              <a:t>Emphasize: A useful answer ends with reproducible evidence and a clear failure classification, not a plausible-looking command alone.</a:t>
             </a:r>
           </a:p>
         </p:txBody>
@@ -713,6 +753,11 @@
           </a:p>
           <a:p xmlns:a="http://schemas.openxmlformats.org/drawingml/2006/main">
             <a:r>
+              <a:t>- https://github.com/uxlfoundation/skills/blob/main/evaluation/harbor/EVALUATOR_POLICY.md</a:t>
+            </a:r>
+          </a:p>
+          <a:p xmlns:a="http://schemas.openxmlformats.org/drawingml/2006/main">
+            <a:r>
               <a:t>[/Sources]</a:t>
             </a:r>
           </a:p>
@@ -723,7 +768,22 @@
           </a:p>
           <a:p xmlns:a="http://schemas.openxmlformats.org/drawingml/2006/main">
             <a:r>
-              <a:t>Speaker cue: Evaluation inventory: all 7 tasks implemented</a:t>
+              <a:t>Presenter guidance</a:t>
+            </a:r>
+          </a:p>
+          <a:p xmlns:a="http://schemas.openxmlformats.org/drawingml/2006/main">
+            <a:r>
+              <a:t>Purpose: Separate evaluation inventory from evidence that the skill improves outcomes.</a:t>
+            </a:r>
+          </a:p>
+          <a:p xmlns:a="http://schemas.openxmlformats.org/drawingml/2006/main">
+            <a:r>
+              <a:t>Explain: all 7 evaluation tasks are implemented; all seven scenarios are runnable, but task count is not evidence of skill benefit; maintainers should distinguish smoke coverage from genuinely discriminating cases.</a:t>
+            </a:r>
+          </a:p>
+          <a:p xmlns:a="http://schemas.openxmlformats.org/drawingml/2006/main">
+            <a:r>
+              <a:t>Emphasize: Implemented means the task can run. It does not mean the task passes, discriminates between treatments, or supports a promotion claim.</a:t>
             </a:r>
           </a:p>
         </p:txBody>
@@ -818,6 +878,11 @@
           </a:p>
           <a:p xmlns:a="http://schemas.openxmlformats.org/drawingml/2006/main">
             <a:r>
+              <a:t>- https://github.com/uxlfoundation/skills/blob/main/evaluation/harbor/EVALUATOR_POLICY.md</a:t>
+            </a:r>
+          </a:p>
+          <a:p xmlns:a="http://schemas.openxmlformats.org/drawingml/2006/main">
+            <a:r>
               <a:t>[/Sources]</a:t>
             </a:r>
           </a:p>
@@ -828,7 +893,22 @@
           </a:p>
           <a:p xmlns:a="http://schemas.openxmlformats.org/drawingml/2006/main">
             <a:r>
-              <a:t>Speaker cue: How we chose the content</a:t>
+              <a:t>Presenter guidance</a:t>
+            </a:r>
+          </a:p>
+          <a:p xmlns:a="http://schemas.openxmlformats.org/drawingml/2006/main">
+            <a:r>
+              <a:t>Purpose: Show how the draft guidance and task set were selected.</a:t>
+            </a:r>
+          </a:p>
+          <a:p xmlns:a="http://schemas.openxmlformats.org/drawingml/2006/main">
+            <a:r>
+              <a:t>Explain: The starting material comes from official oneTBB documentation, examples, tests, and incident-shaped cases involving oversubscription, unsafe state, flow control, cancellation, and exceptions.</a:t>
+            </a:r>
+          </a:p>
+          <a:p xmlns:a="http://schemas.openxmlformats.org/drawingml/2006/main">
+            <a:r>
+              <a:t>Emphasize: Maintainers should correct, remove, or replace anything that does not reflect current project practice.</a:t>
             </a:r>
           </a:p>
         </p:txBody>
@@ -923,6 +1003,11 @@
           </a:p>
           <a:p xmlns:a="http://schemas.openxmlformats.org/drawingml/2006/main">
             <a:r>
+              <a:t>- https://github.com/uxlfoundation/skills/blob/main/evaluation/harbor/EVALUATOR_POLICY.md</a:t>
+            </a:r>
+          </a:p>
+          <a:p xmlns:a="http://schemas.openxmlformats.org/drawingml/2006/main">
+            <a:r>
               <a:t>[/Sources]</a:t>
             </a:r>
           </a:p>
@@ -933,7 +1018,22 @@
           </a:p>
           <a:p xmlns:a="http://schemas.openxmlformats.org/drawingml/2006/main">
             <a:r>
-              <a:t>Speaker cue: What project ownership would look like</a:t>
+              <a:t>Presenter guidance</a:t>
+            </a:r>
+          </a:p>
+          <a:p xmlns:a="http://schemas.openxmlformats.org/drawingml/2006/main">
+            <a:r>
+              <a:t>Purpose: Clarify the proposed ownership boundary.</a:t>
+            </a:r>
+          </a:p>
+          <a:p xmlns:a="http://schemas.openxmlformats.org/drawingml/2006/main">
+            <a:r>
+              <a:t>Explain: oneTBB maintainers own triggers, API truth, source freshness, limitations, and authentic cases; UXL maintains the catalog, Harbor integration, comparison design, and dashboard.</a:t>
+            </a:r>
+          </a:p>
+          <a:p xmlns:a="http://schemas.openxmlformats.org/drawingml/2006/main">
+            <a:r>
+              <a:t>Emphasize: The skill cannot move beyond its incubating state without named project review.</a:t>
             </a:r>
           </a:p>
         </p:txBody>
@@ -1028,6 +1128,11 @@
           </a:p>
           <a:p xmlns:a="http://schemas.openxmlformats.org/drawingml/2006/main">
             <a:r>
+              <a:t>- https://github.com/uxlfoundation/skills/blob/main/evaluation/harbor/EVALUATOR_POLICY.md</a:t>
+            </a:r>
+          </a:p>
+          <a:p xmlns:a="http://schemas.openxmlformats.org/drawingml/2006/main">
+            <a:r>
               <a:t>[/Sources]</a:t>
             </a:r>
           </a:p>
@@ -1038,7 +1143,22 @@
           </a:p>
           <a:p xmlns:a="http://schemas.openxmlformats.org/drawingml/2006/main">
             <a:r>
-              <a:t>Speaker cue: A focused 30-minute maintainer review</a:t>
+              <a:t>Presenter guidance</a:t>
+            </a:r>
+          </a:p>
+          <a:p xmlns:a="http://schemas.openxmlformats.org/drawingml/2006/main">
+            <a:r>
+              <a:t>Purpose: End with a small, concrete review request.</a:t>
+            </a:r>
+          </a:p>
+          <a:p xmlns:a="http://schemas.openxmlformats.org/drawingml/2006/main">
+            <a:r>
+              <a:t>Explain: Ask maintainers to check the trigger and technical guidance, judge the task inventory, and name a reviewer or owner.</a:t>
+            </a:r>
+          </a:p>
+          <a:p xmlns:a="http://schemas.openxmlformats.org/drawingml/2006/main">
+            <a:r>
+              <a:t>Emphasize: The desired output is specific corrections and realistic cases, not blanket endorsement of the draft.</a:t>
             </a:r>
           </a:p>
         </p:txBody>
@@ -1074,7 +1194,7 @@
     <p:bg>
       <p:bgPr>
         <a:blipFill xmlns:a="http://schemas.openxmlformats.org/drawingml/2006/main">
-          <a:blip xmlns:r="http://schemas.openxmlformats.org/officeDocument/2006/relationships" r:embed="R7bc2101834754b01">
+          <a:blip xmlns:r="http://schemas.openxmlformats.org/officeDocument/2006/relationships" r:embed="R04c2d12805594a92">
             <a:alphaModFix/>
           </a:blip>
           <a:stretch>
@@ -1509,7 +1629,7 @@
           <p:nvPr/>
         </p:nvPicPr>
         <p:blipFill rotWithShape="1">
-          <a:blip xmlns:r="http://schemas.openxmlformats.org/officeDocument/2006/relationships" xmlns:a="http://schemas.openxmlformats.org/drawingml/2006/main" r:embed="R2b1f28b6bcc346b4">
+          <a:blip xmlns:r="http://schemas.openxmlformats.org/officeDocument/2006/relationships" xmlns:a="http://schemas.openxmlformats.org/drawingml/2006/main" r:embed="R3cf102a876c24969">
             <a:alphaModFix/>
           </a:blip>
           <a:srcRect xmlns:a="http://schemas.openxmlformats.org/drawingml/2006/main" l="0" t="0" r="0" b="0"/>
@@ -1539,7 +1659,7 @@
     <p:bg>
       <p:bgPr>
         <a:blipFill xmlns:a="http://schemas.openxmlformats.org/drawingml/2006/main">
-          <a:blip xmlns:r="http://schemas.openxmlformats.org/officeDocument/2006/relationships" r:embed="R7b26493363dc4ca0">
+          <a:blip xmlns:r="http://schemas.openxmlformats.org/officeDocument/2006/relationships" r:embed="R70ee6f7fe87844fb">
             <a:alphaModFix/>
           </a:blip>
           <a:stretch>
@@ -2573,7 +2693,7 @@
           <p:nvPr/>
         </p:nvPicPr>
         <p:blipFill rotWithShape="1">
-          <a:blip xmlns:r="http://schemas.openxmlformats.org/officeDocument/2006/relationships" xmlns:a="http://schemas.openxmlformats.org/drawingml/2006/main" r:embed="R18417dca3f6843cd">
+          <a:blip xmlns:r="http://schemas.openxmlformats.org/officeDocument/2006/relationships" xmlns:a="http://schemas.openxmlformats.org/drawingml/2006/main" r:embed="Rb3af05d798a143d2">
             <a:alphaModFix/>
           </a:blip>
           <a:srcRect xmlns:a="http://schemas.openxmlformats.org/drawingml/2006/main" l="0" t="0" r="0" b="0"/>
@@ -3597,7 +3717,7 @@
           <p:nvPr/>
         </p:nvPicPr>
         <p:blipFill rotWithShape="1">
-          <a:blip xmlns:r="http://schemas.openxmlformats.org/officeDocument/2006/relationships" xmlns:a="http://schemas.openxmlformats.org/drawingml/2006/main" r:embed="R35d8f617f8494f95">
+          <a:blip xmlns:r="http://schemas.openxmlformats.org/officeDocument/2006/relationships" xmlns:a="http://schemas.openxmlformats.org/drawingml/2006/main" r:embed="R9948a7ca4f254290">
             <a:alphaModFix/>
           </a:blip>
           <a:srcRect xmlns:a="http://schemas.openxmlformats.org/drawingml/2006/main" l="0" t="0" r="0" b="0"/>
@@ -3627,7 +3747,7 @@
     <p:bg>
       <p:bgPr>
         <a:blipFill xmlns:a="http://schemas.openxmlformats.org/drawingml/2006/main">
-          <a:blip xmlns:r="http://schemas.openxmlformats.org/officeDocument/2006/relationships" r:embed="R1ade7e77323f490c">
+          <a:blip xmlns:r="http://schemas.openxmlformats.org/officeDocument/2006/relationships" r:embed="Re94a05f9853044d9">
             <a:alphaModFix/>
           </a:blip>
           <a:stretch>
@@ -4901,7 +5021,7 @@
           <p:nvPr/>
         </p:nvPicPr>
         <p:blipFill rotWithShape="1">
-          <a:blip xmlns:r="http://schemas.openxmlformats.org/officeDocument/2006/relationships" xmlns:a="http://schemas.openxmlformats.org/drawingml/2006/main" r:embed="R8c15b6730b2e4b5f">
+          <a:blip xmlns:r="http://schemas.openxmlformats.org/officeDocument/2006/relationships" xmlns:a="http://schemas.openxmlformats.org/drawingml/2006/main" r:embed="R0971909cd07443be">
             <a:alphaModFix/>
           </a:blip>
           <a:srcRect xmlns:a="http://schemas.openxmlformats.org/drawingml/2006/main" l="0" t="0" r="0" b="0"/>
@@ -8145,7 +8265,7 @@
           <p:nvPr/>
         </p:nvPicPr>
         <p:blipFill rotWithShape="1">
-          <a:blip xmlns:r="http://schemas.openxmlformats.org/officeDocument/2006/relationships" xmlns:a="http://schemas.openxmlformats.org/drawingml/2006/main" r:embed="R60862399c9004bcd">
+          <a:blip xmlns:r="http://schemas.openxmlformats.org/officeDocument/2006/relationships" xmlns:a="http://schemas.openxmlformats.org/drawingml/2006/main" r:embed="R3f40be4598a54ce1">
             <a:alphaModFix/>
           </a:blip>
           <a:srcRect xmlns:a="http://schemas.openxmlformats.org/drawingml/2006/main" l="0" t="0" r="0" b="0"/>
@@ -9883,7 +10003,7 @@
           <p:nvPr/>
         </p:nvPicPr>
         <p:blipFill rotWithShape="1">
-          <a:blip xmlns:r="http://schemas.openxmlformats.org/officeDocument/2006/relationships" xmlns:a="http://schemas.openxmlformats.org/drawingml/2006/main" r:embed="Rd00225c60d964010">
+          <a:blip xmlns:r="http://schemas.openxmlformats.org/officeDocument/2006/relationships" xmlns:a="http://schemas.openxmlformats.org/drawingml/2006/main" r:embed="R4fcd749afa524a24">
             <a:alphaModFix/>
           </a:blip>
           <a:srcRect xmlns:a="http://schemas.openxmlformats.org/drawingml/2006/main" l="0" t="0" r="0" b="0"/>
@@ -16712,7 +16832,7 @@
     <p:bg>
       <p:bgPr>
         <a:blipFill xmlns:a="http://schemas.openxmlformats.org/drawingml/2006/main">
-          <a:blip xmlns:r="http://schemas.openxmlformats.org/officeDocument/2006/relationships" r:embed="Rb545341e36854ede">
+          <a:blip xmlns:r="http://schemas.openxmlformats.org/officeDocument/2006/relationships" r:embed="Reda90069ff5448ad">
             <a:alphaModFix/>
           </a:blip>
           <a:stretch>
@@ -17147,7 +17267,7 @@
           <p:nvPr/>
         </p:nvPicPr>
         <p:blipFill rotWithShape="1">
-          <a:blip xmlns:r="http://schemas.openxmlformats.org/officeDocument/2006/relationships" xmlns:a="http://schemas.openxmlformats.org/drawingml/2006/main" r:embed="Rfcad40abc96b4457">
+          <a:blip xmlns:r="http://schemas.openxmlformats.org/officeDocument/2006/relationships" xmlns:a="http://schemas.openxmlformats.org/drawingml/2006/main" r:embed="R5ff116fb53dd42b9">
             <a:alphaModFix/>
           </a:blip>
           <a:srcRect xmlns:a="http://schemas.openxmlformats.org/drawingml/2006/main" l="0" t="0" r="0" b="0"/>
@@ -17177,7 +17297,7 @@
     <p:bg>
       <p:bgPr>
         <a:blipFill xmlns:a="http://schemas.openxmlformats.org/drawingml/2006/main">
-          <a:blip xmlns:r="http://schemas.openxmlformats.org/officeDocument/2006/relationships" r:embed="R42e6f1569f9f4e6e">
+          <a:blip xmlns:r="http://schemas.openxmlformats.org/officeDocument/2006/relationships" r:embed="R614d6312c3a14908">
             <a:alphaModFix/>
           </a:blip>
           <a:stretch>
@@ -17810,7 +17930,7 @@
           <p:nvPr/>
         </p:nvPicPr>
         <p:blipFill rotWithShape="1">
-          <a:blip xmlns:r="http://schemas.openxmlformats.org/officeDocument/2006/relationships" xmlns:a="http://schemas.openxmlformats.org/drawingml/2006/main" r:embed="R9f1f31a0465f44bb">
+          <a:blip xmlns:r="http://schemas.openxmlformats.org/officeDocument/2006/relationships" xmlns:a="http://schemas.openxmlformats.org/drawingml/2006/main" r:embed="Rd807897f497b4597">
             <a:alphaModFix/>
           </a:blip>
           <a:srcRect xmlns:a="http://schemas.openxmlformats.org/drawingml/2006/main" l="0" t="0" r="0" b="0"/>
@@ -18270,7 +18390,7 @@
     <p:bg>
       <p:bgPr>
         <a:blipFill xmlns:a="http://schemas.openxmlformats.org/drawingml/2006/main">
-          <a:blip xmlns:r="http://schemas.openxmlformats.org/officeDocument/2006/relationships" r:embed="R1b9117fd61e44f66">
+          <a:blip xmlns:r="http://schemas.openxmlformats.org/officeDocument/2006/relationships" r:embed="R3f48413344e14eed">
             <a:alphaModFix/>
           </a:blip>
           <a:stretch>
@@ -18903,7 +19023,7 @@
           <p:nvPr/>
         </p:nvPicPr>
         <p:blipFill rotWithShape="1">
-          <a:blip xmlns:r="http://schemas.openxmlformats.org/officeDocument/2006/relationships" xmlns:a="http://schemas.openxmlformats.org/drawingml/2006/main" r:embed="Rde23698e70fe4e6e">
+          <a:blip xmlns:r="http://schemas.openxmlformats.org/officeDocument/2006/relationships" xmlns:a="http://schemas.openxmlformats.org/drawingml/2006/main" r:embed="R02763734aec94c11">
             <a:alphaModFix/>
           </a:blip>
           <a:srcRect xmlns:a="http://schemas.openxmlformats.org/drawingml/2006/main" l="0" t="0" r="0" b="0"/>
@@ -21559,7 +21679,7 @@
           <p:nvPr/>
         </p:nvPicPr>
         <p:blipFill rotWithShape="1">
-          <a:blip xmlns:r="http://schemas.openxmlformats.org/officeDocument/2006/relationships" xmlns:a="http://schemas.openxmlformats.org/drawingml/2006/main" r:embed="R14fe23edd4e4446f">
+          <a:blip xmlns:r="http://schemas.openxmlformats.org/officeDocument/2006/relationships" xmlns:a="http://schemas.openxmlformats.org/drawingml/2006/main" r:embed="Ra44dc3439fb845c8">
             <a:alphaModFix/>
           </a:blip>
           <a:srcRect xmlns:a="http://schemas.openxmlformats.org/drawingml/2006/main" l="0" t="0" r="0" b="0"/>
@@ -21589,7 +21709,7 @@
     <p:bg>
       <p:bgPr>
         <a:blipFill xmlns:a="http://schemas.openxmlformats.org/drawingml/2006/main">
-          <a:blip xmlns:r="http://schemas.openxmlformats.org/officeDocument/2006/relationships" r:embed="R57525fd96617442a">
+          <a:blip xmlns:r="http://schemas.openxmlformats.org/officeDocument/2006/relationships" r:embed="Rf791f1ad526a476c">
             <a:alphaModFix/>
           </a:blip>
           <a:stretch>
@@ -22433,7 +22553,7 @@
           <p:nvPr/>
         </p:nvPicPr>
         <p:blipFill rotWithShape="1">
-          <a:blip xmlns:r="http://schemas.openxmlformats.org/officeDocument/2006/relationships" xmlns:a="http://schemas.openxmlformats.org/drawingml/2006/main" r:embed="R438d5dfe167b4110">
+          <a:blip xmlns:r="http://schemas.openxmlformats.org/officeDocument/2006/relationships" xmlns:a="http://schemas.openxmlformats.org/drawingml/2006/main" r:embed="R9eb3927b710f44de">
             <a:alphaModFix/>
           </a:blip>
           <a:srcRect xmlns:a="http://schemas.openxmlformats.org/drawingml/2006/main" l="0" t="0" r="0" b="0"/>
@@ -22463,7 +22583,7 @@
     <p:bg>
       <p:bgPr>
         <a:blipFill xmlns:a="http://schemas.openxmlformats.org/drawingml/2006/main">
-          <a:blip xmlns:r="http://schemas.openxmlformats.org/officeDocument/2006/relationships" r:embed="Ra1d92204151f4203">
+          <a:blip xmlns:r="http://schemas.openxmlformats.org/officeDocument/2006/relationships" r:embed="Rbcadbad6c1d84b35">
             <a:alphaModFix/>
           </a:blip>
           <a:stretch>
@@ -23411,7 +23531,7 @@
           <p:nvPr/>
         </p:nvPicPr>
         <p:blipFill rotWithShape="1">
-          <a:blip xmlns:r="http://schemas.openxmlformats.org/officeDocument/2006/relationships" xmlns:a="http://schemas.openxmlformats.org/drawingml/2006/main" r:embed="Rc6279d0a114842e1">
+          <a:blip xmlns:r="http://schemas.openxmlformats.org/officeDocument/2006/relationships" xmlns:a="http://schemas.openxmlformats.org/drawingml/2006/main" r:embed="Rfd2f824849c0424d">
             <a:alphaModFix/>
           </a:blip>
           <a:srcRect xmlns:a="http://schemas.openxmlformats.org/drawingml/2006/main" l="0" t="0" r="0" b="0"/>
@@ -23441,7 +23561,7 @@
     <p:bg>
       <p:bgPr>
         <a:blipFill xmlns:a="http://schemas.openxmlformats.org/drawingml/2006/main">
-          <a:blip xmlns:r="http://schemas.openxmlformats.org/officeDocument/2006/relationships" r:embed="Ra9e46c8ac4914e0e">
+          <a:blip xmlns:r="http://schemas.openxmlformats.org/officeDocument/2006/relationships" r:embed="R096be7273fea49af">
             <a:alphaModFix/>
           </a:blip>
           <a:stretch>
@@ -23902,7 +24022,7 @@
           <p:nvPr/>
         </p:nvPicPr>
         <p:blipFill rotWithShape="1">
-          <a:blip xmlns:r="http://schemas.openxmlformats.org/officeDocument/2006/relationships" xmlns:a="http://schemas.openxmlformats.org/drawingml/2006/main" r:embed="Rec86d0c9600d4720">
+          <a:blip xmlns:r="http://schemas.openxmlformats.org/officeDocument/2006/relationships" xmlns:a="http://schemas.openxmlformats.org/drawingml/2006/main" r:embed="Ra1aaad55c1214e2d">
             <a:alphaModFix/>
           </a:blip>
           <a:srcRect xmlns:a="http://schemas.openxmlformats.org/drawingml/2006/main" l="0" t="0" r="0" b="0"/>
@@ -25614,22 +25734,22 @@
   </p:cSld>
   <p:clrMap bg1="lt1" tx1="dk1" bg2="dk2" tx2="lt2" accent1="accent1" accent2="accent2" accent3="accent3" accent4="accent4" accent5="accent5" accent6="accent6" hlink="hlink" folHlink="folHlink"/>
   <p:sldLayoutIdLst>
-    <p:sldLayoutId xmlns:r="http://schemas.openxmlformats.org/officeDocument/2006/relationships" id="2147483649" r:id="R070ff2da4d944156"/>
-    <p:sldLayoutId xmlns:r="http://schemas.openxmlformats.org/officeDocument/2006/relationships" id="2147483650" r:id="Rd3dd6dc3cdec42c1"/>
-    <p:sldLayoutId xmlns:r="http://schemas.openxmlformats.org/officeDocument/2006/relationships" id="2147483651" r:id="R7a677abec70149b3"/>
-    <p:sldLayoutId xmlns:r="http://schemas.openxmlformats.org/officeDocument/2006/relationships" id="2147483652" r:id="Re4a55b36f658492c"/>
-    <p:sldLayoutId xmlns:r="http://schemas.openxmlformats.org/officeDocument/2006/relationships" id="2147483653" r:id="Rf8970b4265c444dd"/>
-    <p:sldLayoutId xmlns:r="http://schemas.openxmlformats.org/officeDocument/2006/relationships" id="2147483654" r:id="R6d6f2b968ec94bef"/>
-    <p:sldLayoutId xmlns:r="http://schemas.openxmlformats.org/officeDocument/2006/relationships" id="2147483655" r:id="R3fc7cfa96ab441f6"/>
-    <p:sldLayoutId xmlns:r="http://schemas.openxmlformats.org/officeDocument/2006/relationships" id="2147483656" r:id="R28af136d12e74d1a"/>
-    <p:sldLayoutId xmlns:r="http://schemas.openxmlformats.org/officeDocument/2006/relationships" id="2147483657" r:id="R14305fcb7ff84d6a"/>
-    <p:sldLayoutId xmlns:r="http://schemas.openxmlformats.org/officeDocument/2006/relationships" id="2147483658" r:id="R9d31cdc19f8e41b7"/>
-    <p:sldLayoutId xmlns:r="http://schemas.openxmlformats.org/officeDocument/2006/relationships" id="2147483659" r:id="Rfb3826a1820d4fb9"/>
-    <p:sldLayoutId xmlns:r="http://schemas.openxmlformats.org/officeDocument/2006/relationships" id="2147483660" r:id="R4ba4fe5800f2463f"/>
-    <p:sldLayoutId xmlns:r="http://schemas.openxmlformats.org/officeDocument/2006/relationships" id="2147483661" r:id="Rd3448cb120884759"/>
-    <p:sldLayoutId xmlns:r="http://schemas.openxmlformats.org/officeDocument/2006/relationships" id="2147483662" r:id="R1efaf594fc6142e7"/>
-    <p:sldLayoutId xmlns:r="http://schemas.openxmlformats.org/officeDocument/2006/relationships" id="2147483663" r:id="R399d4f51fa014256"/>
-    <p:sldLayoutId xmlns:r="http://schemas.openxmlformats.org/officeDocument/2006/relationships" id="2147483664" r:id="Rbc600858ad0a4bbd"/>
+    <p:sldLayoutId xmlns:r="http://schemas.openxmlformats.org/officeDocument/2006/relationships" id="2147483649" r:id="R918b40f5007a40a1"/>
+    <p:sldLayoutId xmlns:r="http://schemas.openxmlformats.org/officeDocument/2006/relationships" id="2147483650" r:id="Rda82826c3481447c"/>
+    <p:sldLayoutId xmlns:r="http://schemas.openxmlformats.org/officeDocument/2006/relationships" id="2147483651" r:id="Rd59c1dff1c77412d"/>
+    <p:sldLayoutId xmlns:r="http://schemas.openxmlformats.org/officeDocument/2006/relationships" id="2147483652" r:id="R63afa14f318f402a"/>
+    <p:sldLayoutId xmlns:r="http://schemas.openxmlformats.org/officeDocument/2006/relationships" id="2147483653" r:id="Ra2fea1a83e5e4492"/>
+    <p:sldLayoutId xmlns:r="http://schemas.openxmlformats.org/officeDocument/2006/relationships" id="2147483654" r:id="Rd7da86b784584c38"/>
+    <p:sldLayoutId xmlns:r="http://schemas.openxmlformats.org/officeDocument/2006/relationships" id="2147483655" r:id="R1ebb7f081de74214"/>
+    <p:sldLayoutId xmlns:r="http://schemas.openxmlformats.org/officeDocument/2006/relationships" id="2147483656" r:id="R2d1a42607be54b56"/>
+    <p:sldLayoutId xmlns:r="http://schemas.openxmlformats.org/officeDocument/2006/relationships" id="2147483657" r:id="Rcc6ac89cec5b4a11"/>
+    <p:sldLayoutId xmlns:r="http://schemas.openxmlformats.org/officeDocument/2006/relationships" id="2147483658" r:id="R970cc65d767b4f0e"/>
+    <p:sldLayoutId xmlns:r="http://schemas.openxmlformats.org/officeDocument/2006/relationships" id="2147483659" r:id="R769483e5a4464413"/>
+    <p:sldLayoutId xmlns:r="http://schemas.openxmlformats.org/officeDocument/2006/relationships" id="2147483660" r:id="R25e04ac2db9f4752"/>
+    <p:sldLayoutId xmlns:r="http://schemas.openxmlformats.org/officeDocument/2006/relationships" id="2147483661" r:id="Rf5111fa826f64b2c"/>
+    <p:sldLayoutId xmlns:r="http://schemas.openxmlformats.org/officeDocument/2006/relationships" id="2147483662" r:id="R56a937aade3f4f27"/>
+    <p:sldLayoutId xmlns:r="http://schemas.openxmlformats.org/officeDocument/2006/relationships" id="2147483663" r:id="R4a5fad6c55164b8f"/>
+    <p:sldLayoutId xmlns:r="http://schemas.openxmlformats.org/officeDocument/2006/relationships" id="2147483664" r:id="Rdbd72fb7f62446c9"/>
   </p:sldLayoutIdLst>
   <p:hf hdr="0" ftr="0" dt="0"/>
   <p:txStyles>
@@ -27822,7 +27942,7 @@
           <p:nvPr/>
         </p:nvPicPr>
         <p:blipFill rotWithShape="1">
-          <a:blip xmlns:r="http://schemas.openxmlformats.org/officeDocument/2006/relationships" xmlns:a="http://schemas.openxmlformats.org/drawingml/2006/main" r:embed="R61f1236d4ec24f63">
+          <a:blip xmlns:r="http://schemas.openxmlformats.org/officeDocument/2006/relationships" xmlns:a="http://schemas.openxmlformats.org/drawingml/2006/main" r:embed="Rcede04f73ee74d29">
             <a:alphaModFix/>
           </a:blip>
           <a:srcRect xmlns:a="http://schemas.openxmlformats.org/drawingml/2006/main" l="0" t="0" r="0" b="0"/>
@@ -27845,19 +27965,19 @@
   </p:cSld>
   <p:clrMap bg1="lt1" tx1="dk1" bg2="dk2" tx2="lt2" accent1="accent1" accent2="accent2" accent3="accent3" accent4="accent4" accent5="accent5" accent6="accent6" hlink="hlink" folHlink="folHlink"/>
   <p:sldLayoutIdLst>
-    <p:sldLayoutId xmlns:r="http://schemas.openxmlformats.org/officeDocument/2006/relationships" id="2147483666" r:id="Rd55ee1177f024844"/>
-    <p:sldLayoutId xmlns:r="http://schemas.openxmlformats.org/officeDocument/2006/relationships" id="2147483667" r:id="R18428e40ce954059"/>
-    <p:sldLayoutId xmlns:r="http://schemas.openxmlformats.org/officeDocument/2006/relationships" id="2147483668" r:id="R04bfd3c21c124351"/>
-    <p:sldLayoutId xmlns:r="http://schemas.openxmlformats.org/officeDocument/2006/relationships" id="2147483669" r:id="R1721c357195744b1"/>
-    <p:sldLayoutId xmlns:r="http://schemas.openxmlformats.org/officeDocument/2006/relationships" id="2147483670" r:id="R6b2ff1f7bd034e43"/>
-    <p:sldLayoutId xmlns:r="http://schemas.openxmlformats.org/officeDocument/2006/relationships" id="2147483671" r:id="R354981e428234b45"/>
-    <p:sldLayoutId xmlns:r="http://schemas.openxmlformats.org/officeDocument/2006/relationships" id="2147483672" r:id="R5ff7886dc4984a9c"/>
-    <p:sldLayoutId xmlns:r="http://schemas.openxmlformats.org/officeDocument/2006/relationships" id="2147483673" r:id="R964758be84834f04"/>
-    <p:sldLayoutId xmlns:r="http://schemas.openxmlformats.org/officeDocument/2006/relationships" id="2147483674" r:id="R6976709262a143c1"/>
-    <p:sldLayoutId xmlns:r="http://schemas.openxmlformats.org/officeDocument/2006/relationships" id="2147483675" r:id="Rf6d61a31abd646e8"/>
-    <p:sldLayoutId xmlns:r="http://schemas.openxmlformats.org/officeDocument/2006/relationships" id="2147483676" r:id="R97268f571b874de3"/>
-    <p:sldLayoutId xmlns:r="http://schemas.openxmlformats.org/officeDocument/2006/relationships" id="2147483677" r:id="R8fc6cad4f96141a8"/>
-    <p:sldLayoutId xmlns:r="http://schemas.openxmlformats.org/officeDocument/2006/relationships" id="2147483678" r:id="Rf7a67d1d757d432d"/>
+    <p:sldLayoutId xmlns:r="http://schemas.openxmlformats.org/officeDocument/2006/relationships" id="2147483666" r:id="R03092a2ea1c14080"/>
+    <p:sldLayoutId xmlns:r="http://schemas.openxmlformats.org/officeDocument/2006/relationships" id="2147483667" r:id="Rcac8ab27fc5c4058"/>
+    <p:sldLayoutId xmlns:r="http://schemas.openxmlformats.org/officeDocument/2006/relationships" id="2147483668" r:id="Rb56ae9d1d23c44d2"/>
+    <p:sldLayoutId xmlns:r="http://schemas.openxmlformats.org/officeDocument/2006/relationships" id="2147483669" r:id="Rc3f9d200f45646f6"/>
+    <p:sldLayoutId xmlns:r="http://schemas.openxmlformats.org/officeDocument/2006/relationships" id="2147483670" r:id="Rcf5ee4bb1b844134"/>
+    <p:sldLayoutId xmlns:r="http://schemas.openxmlformats.org/officeDocument/2006/relationships" id="2147483671" r:id="Rdefa5de45ae4497f"/>
+    <p:sldLayoutId xmlns:r="http://schemas.openxmlformats.org/officeDocument/2006/relationships" id="2147483672" r:id="R10079737ec26418f"/>
+    <p:sldLayoutId xmlns:r="http://schemas.openxmlformats.org/officeDocument/2006/relationships" id="2147483673" r:id="Rf38279f7bba04b89"/>
+    <p:sldLayoutId xmlns:r="http://schemas.openxmlformats.org/officeDocument/2006/relationships" id="2147483674" r:id="R1bbb1a9ac1ea4869"/>
+    <p:sldLayoutId xmlns:r="http://schemas.openxmlformats.org/officeDocument/2006/relationships" id="2147483675" r:id="R90530f1409da4743"/>
+    <p:sldLayoutId xmlns:r="http://schemas.openxmlformats.org/officeDocument/2006/relationships" id="2147483676" r:id="Ra53d3c98e44f4111"/>
+    <p:sldLayoutId xmlns:r="http://schemas.openxmlformats.org/officeDocument/2006/relationships" id="2147483677" r:id="Rdff6224e5bd34ba1"/>
+    <p:sldLayoutId xmlns:r="http://schemas.openxmlformats.org/officeDocument/2006/relationships" id="2147483678" r:id="Rafae0fd80c0149b3"/>
   </p:sldLayoutIdLst>
   <p:hf hdr="0" ftr="0" dt="0"/>
   <p:txStyles>
